--- a/image/image.pptx
+++ b/image/image.pptx
@@ -238,7 +238,7 @@
           <a:p>
             <a:fld id="{B4264C6C-A75F-4F4B-983B-561CAC384A89}" type="datetimeFigureOut">
               <a:rPr lang="en-US" smtClean="0"/>
-              <a:t>11/13/25</a:t>
+              <a:t>10/29/26</a:t>
             </a:fld>
             <a:endParaRPr lang="en-US"/>
           </a:p>
@@ -431,7 +431,7 @@
           <a:p>
             <a:fld id="{4ECC8E03-5825-4C42-8DC2-B65F04B88FE7}" type="datetimeFigureOut">
               <a:rPr lang="en-US" smtClean="0"/>
-              <a:t>11/13/25</a:t>
+              <a:t>10/29/26</a:t>
             </a:fld>
             <a:endParaRPr lang="en-US"/>
           </a:p>
@@ -738,6 +738,13 @@
           </p:nvPr>
         </p:nvSpPr>
         <p:spPr/>
+        <p:txBody>
+          <a:bodyPr/>
+          <a:lstStyle/>
+          <a:p>
+            <a:endParaRPr lang="ja-JP" altLang="en-US"/>
+          </a:p>
+        </p:txBody>
       </p:sp>
       <p:sp>
         <p:nvSpPr>
@@ -1408,58 +1415,6 @@
       </p:grpSpPr>
       <p:sp>
         <p:nvSpPr>
-          <p:cNvPr id="3" name="正方形/長方形 2">
-            <a:extLst>
-              <a:ext uri="{FF2B5EF4-FFF2-40B4-BE49-F238E27FC236}">
-                <a16:creationId xmlns:a16="http://schemas.microsoft.com/office/drawing/2014/main" id="{A226FEA1-FB79-3827-0677-D55FEF4038FE}"/>
-              </a:ext>
-            </a:extLst>
-          </p:cNvPr>
-          <p:cNvSpPr/>
-          <p:nvPr/>
-        </p:nvSpPr>
-        <p:spPr>
-          <a:xfrm>
-            <a:off x="3918" y="24698"/>
-            <a:ext cx="12188082" cy="6833302"/>
-          </a:xfrm>
-          <a:prstGeom prst="rect">
-            <a:avLst/>
-          </a:prstGeom>
-          <a:solidFill>
-            <a:srgbClr val="161E2D"/>
-          </a:solidFill>
-          <a:ln>
-            <a:noFill/>
-          </a:ln>
-        </p:spPr>
-        <p:style>
-          <a:lnRef idx="2">
-            <a:schemeClr val="accent1">
-              <a:shade val="50000"/>
-            </a:schemeClr>
-          </a:lnRef>
-          <a:fillRef idx="1">
-            <a:schemeClr val="accent1"/>
-          </a:fillRef>
-          <a:effectRef idx="0">
-            <a:schemeClr val="accent1"/>
-          </a:effectRef>
-          <a:fontRef idx="minor">
-            <a:schemeClr val="lt1"/>
-          </a:fontRef>
-        </p:style>
-        <p:txBody>
-          <a:bodyPr rtlCol="0" anchor="ctr"/>
-          <a:lstStyle/>
-          <a:p>
-            <a:pPr algn="ctr"/>
-            <a:endParaRPr kumimoji="1" lang="ja-JP" altLang="en-US" dirty="0" err="1"/>
-          </a:p>
-        </p:txBody>
-      </p:sp>
-      <p:sp>
-        <p:nvSpPr>
           <p:cNvPr id="2" name="タイトル 1">
             <a:extLst>
               <a:ext uri="{FF2B5EF4-FFF2-40B4-BE49-F238E27FC236}">
@@ -1487,2207 +1442,2248 @@
           </a:p>
         </p:txBody>
       </p:sp>
-      <p:pic>
-        <p:nvPicPr>
-          <p:cNvPr id="9" name="Graphic 23" descr="A representation of a general resource icon.">
+      <p:grpSp>
+        <p:nvGrpSpPr>
+          <p:cNvPr id="22" name="グループ化 21">
             <a:extLst>
               <a:ext uri="{FF2B5EF4-FFF2-40B4-BE49-F238E27FC236}">
-                <a16:creationId xmlns:a16="http://schemas.microsoft.com/office/drawing/2014/main" id="{3BEFAF75-B622-CF24-4446-AEA6EFC2E838}"/>
+                <a16:creationId xmlns:a16="http://schemas.microsoft.com/office/drawing/2014/main" id="{A6756C6A-E924-403D-C96D-923AF6BE0C3A}"/>
               </a:ext>
             </a:extLst>
           </p:cNvPr>
-          <p:cNvPicPr>
-            <a:picLocks noChangeAspect="1" noChangeArrowheads="1"/>
-          </p:cNvPicPr>
+          <p:cNvGrpSpPr/>
           <p:nvPr/>
-        </p:nvPicPr>
-        <p:blipFill>
-          <a:blip r:embed="rId3">
+        </p:nvGrpSpPr>
+        <p:grpSpPr>
+          <a:xfrm>
+            <a:off x="819478" y="1853514"/>
+            <a:ext cx="10363386" cy="3661714"/>
+            <a:chOff x="809365" y="2275228"/>
+            <a:chExt cx="9132397" cy="3240000"/>
+          </a:xfrm>
+        </p:grpSpPr>
+        <p:pic>
+          <p:nvPicPr>
+            <p:cNvPr id="9" name="Graphic 23" descr="A representation of a general resource icon.">
+              <a:extLst>
+                <a:ext uri="{FF2B5EF4-FFF2-40B4-BE49-F238E27FC236}">
+                  <a16:creationId xmlns:a16="http://schemas.microsoft.com/office/drawing/2014/main" id="{3BEFAF75-B622-CF24-4446-AEA6EFC2E838}"/>
+                </a:ext>
+              </a:extLst>
+            </p:cNvPr>
+            <p:cNvPicPr>
+              <a:picLocks noChangeAspect="1" noChangeArrowheads="1"/>
+            </p:cNvPicPr>
+            <p:nvPr/>
+          </p:nvPicPr>
+          <p:blipFill>
+            <a:blip>
+              <a:extLst>
+                <a:ext uri="{96DAC541-7B7A-43D3-8B79-37D633B846F1}">
+                  <asvg:svgBlip xmlns:asvg="http://schemas.microsoft.com/office/drawing/2016/SVG/main" r:embed="rId3"/>
+                </a:ext>
+              </a:extLst>
+            </a:blip>
+            <a:srcRect/>
+            <a:stretch/>
+          </p:blipFill>
+          <p:spPr bwMode="auto">
+            <a:xfrm flipH="1">
+              <a:off x="1144136" y="2655868"/>
+              <a:ext cx="469900" cy="469900"/>
+            </a:xfrm>
+            <a:prstGeom prst="rect">
+              <a:avLst/>
+            </a:prstGeom>
+            <a:noFill/>
+            <a:ln>
+              <a:noFill/>
+            </a:ln>
             <a:extLst>
-              <a:ext uri="{96DAC541-7B7A-43D3-8B79-37D633B846F1}">
-                <asvg:svgBlip xmlns:asvg="http://schemas.microsoft.com/office/drawing/2016/SVG/main" r:embed="rId4"/>
+              <a:ext uri="{909E8E84-426E-40DD-AFC4-6F175D3DCCD1}">
+                <a14:hiddenFill xmlns:a14="http://schemas.microsoft.com/office/drawing/2010/main">
+                  <a:solidFill>
+                    <a:srgbClr val="FFFFFF"/>
+                  </a:solidFill>
+                </a14:hiddenFill>
+              </a:ext>
+              <a:ext uri="{91240B29-F687-4F45-9708-019B960494DF}">
+                <a14:hiddenLine xmlns:a14="http://schemas.microsoft.com/office/drawing/2010/main" w="9525">
+                  <a:solidFill>
+                    <a:srgbClr val="000000"/>
+                  </a:solidFill>
+                  <a:miter lim="800000"/>
+                  <a:headEnd/>
+                  <a:tailEnd/>
+                </a14:hiddenLine>
               </a:ext>
             </a:extLst>
-          </a:blip>
-          <a:srcRect/>
-          <a:stretch/>
-        </p:blipFill>
-        <p:spPr bwMode="auto">
-          <a:xfrm flipH="1">
-            <a:off x="822876" y="4088428"/>
-            <a:ext cx="469900" cy="469900"/>
-          </a:xfrm>
-          <a:prstGeom prst="rect">
-            <a:avLst/>
-          </a:prstGeom>
-          <a:noFill/>
-          <a:ln>
+          </p:spPr>
+        </p:pic>
+        <p:sp>
+          <p:nvSpPr>
+            <p:cNvPr id="33" name="Rectangle 39">
+              <a:extLst>
+                <a:ext uri="{FF2B5EF4-FFF2-40B4-BE49-F238E27FC236}">
+                  <a16:creationId xmlns:a16="http://schemas.microsoft.com/office/drawing/2014/main" id="{474920EF-E862-D292-7533-A322FE45CBB4}"/>
+                </a:ext>
+              </a:extLst>
+            </p:cNvPr>
+            <p:cNvSpPr/>
+            <p:nvPr/>
+          </p:nvSpPr>
+          <p:spPr>
+            <a:xfrm>
+              <a:off x="3641762" y="2275228"/>
+              <a:ext cx="6300000" cy="3240000"/>
+            </a:xfrm>
+            <a:prstGeom prst="rect">
+              <a:avLst/>
+            </a:prstGeom>
             <a:noFill/>
-          </a:ln>
-          <a:extLst>
-            <a:ext uri="{909E8E84-426E-40DD-AFC4-6F175D3DCCD1}">
-              <a14:hiddenFill xmlns:a14="http://schemas.microsoft.com/office/drawing/2010/main">
-                <a:solidFill>
-                  <a:srgbClr val="FFFFFF"/>
-                </a:solidFill>
-              </a14:hiddenFill>
-            </a:ext>
-            <a:ext uri="{91240B29-F687-4F45-9708-019B960494DF}">
-              <a14:hiddenLine xmlns:a14="http://schemas.microsoft.com/office/drawing/2010/main" w="9525">
-                <a:solidFill>
-                  <a:srgbClr val="000000"/>
-                </a:solidFill>
-                <a:miter lim="800000"/>
-                <a:headEnd/>
-                <a:tailEnd/>
-              </a14:hiddenLine>
-            </a:ext>
-          </a:extLst>
-        </p:spPr>
-      </p:pic>
-      <p:sp>
-        <p:nvSpPr>
-          <p:cNvPr id="25" name="Rectangle 21">
-            <a:extLst>
-              <a:ext uri="{FF2B5EF4-FFF2-40B4-BE49-F238E27FC236}">
-                <a16:creationId xmlns:a16="http://schemas.microsoft.com/office/drawing/2014/main" id="{93D84ABD-84A1-EB52-5617-A544AA9D119D}"/>
-              </a:ext>
-            </a:extLst>
-          </p:cNvPr>
-          <p:cNvSpPr/>
-          <p:nvPr/>
-        </p:nvSpPr>
-        <p:spPr>
-          <a:xfrm>
-            <a:off x="1780573" y="1353718"/>
-            <a:ext cx="9111208" cy="4680000"/>
-          </a:xfrm>
-          <a:prstGeom prst="rect">
-            <a:avLst/>
-          </a:prstGeom>
-          <a:noFill/>
-          <a:ln w="15875">
-            <a:solidFill>
-              <a:schemeClr val="tx1"/>
-            </a:solidFill>
-          </a:ln>
-        </p:spPr>
-        <p:style>
-          <a:lnRef idx="2">
-            <a:schemeClr val="accent1">
-              <a:shade val="50000"/>
-            </a:schemeClr>
-          </a:lnRef>
-          <a:fillRef idx="1">
-            <a:schemeClr val="accent1"/>
-          </a:fillRef>
-          <a:effectRef idx="0">
-            <a:schemeClr val="accent1"/>
-          </a:effectRef>
-          <a:fontRef idx="minor">
-            <a:schemeClr val="lt1"/>
-          </a:fontRef>
-        </p:style>
-        <p:txBody>
-          <a:bodyPr lIns="502920" tIns="91440"/>
-          <a:lstStyle/>
-          <a:p>
-            <a:pPr eaLnBrk="1" fontAlgn="auto" hangingPunct="1">
-              <a:spcBef>
-                <a:spcPts val="0"/>
-              </a:spcBef>
-              <a:spcAft>
-                <a:spcPts val="0"/>
-              </a:spcAft>
-              <a:defRPr/>
-            </a:pPr>
-            <a:r>
-              <a:rPr lang="en-US" sz="1050" dirty="0">
-                <a:solidFill>
-                  <a:schemeClr val="tx1"/>
-                </a:solidFill>
-                <a:latin typeface="Arial" panose="020B0604020202020204" pitchFamily="34" charset="0"/>
-                <a:cs typeface="Arial" panose="020B0604020202020204" pitchFamily="34" charset="0"/>
-              </a:rPr>
-              <a:t>AWS Cloud</a:t>
-            </a:r>
-          </a:p>
-        </p:txBody>
-      </p:sp>
-      <p:pic>
-        <p:nvPicPr>
-          <p:cNvPr id="26" name="Graphic 22">
-            <a:extLst>
-              <a:ext uri="{FF2B5EF4-FFF2-40B4-BE49-F238E27FC236}">
-                <a16:creationId xmlns:a16="http://schemas.microsoft.com/office/drawing/2014/main" id="{4CF8373F-0328-818B-22B6-D2989F2C2D2A}"/>
-              </a:ext>
-            </a:extLst>
-          </p:cNvPr>
-          <p:cNvPicPr>
-            <a:picLocks noChangeAspect="1"/>
-          </p:cNvPicPr>
-          <p:nvPr/>
-        </p:nvPicPr>
-        <p:blipFill>
-          <a:blip r:embed="rId5">
-            <a:extLst>
-              <a:ext uri="{96DAC541-7B7A-43D3-8B79-37D633B846F1}">
-                <asvg:svgBlip xmlns:asvg="http://schemas.microsoft.com/office/drawing/2016/SVG/main" r:embed="rId6"/>
-              </a:ext>
-            </a:extLst>
-          </a:blip>
-          <a:srcRect/>
-          <a:stretch/>
-        </p:blipFill>
-        <p:spPr>
-          <a:xfrm>
-            <a:off x="1780573" y="1353718"/>
-            <a:ext cx="381000" cy="381000"/>
-          </a:xfrm>
-          <a:prstGeom prst="rect">
-            <a:avLst/>
-          </a:prstGeom>
-        </p:spPr>
-      </p:pic>
-      <p:sp>
-        <p:nvSpPr>
-          <p:cNvPr id="33" name="Rectangle 39">
-            <a:extLst>
-              <a:ext uri="{FF2B5EF4-FFF2-40B4-BE49-F238E27FC236}">
-                <a16:creationId xmlns:a16="http://schemas.microsoft.com/office/drawing/2014/main" id="{474920EF-E862-D292-7533-A322FE45CBB4}"/>
-              </a:ext>
-            </a:extLst>
-          </p:cNvPr>
-          <p:cNvSpPr/>
-          <p:nvPr/>
-        </p:nvSpPr>
-        <p:spPr>
-          <a:xfrm>
-            <a:off x="3641762" y="2275228"/>
-            <a:ext cx="6300000" cy="3240000"/>
-          </a:xfrm>
-          <a:prstGeom prst="rect">
-            <a:avLst/>
-          </a:prstGeom>
-          <a:noFill/>
-          <a:ln w="15875">
-            <a:solidFill>
-              <a:srgbClr val="8C4FFF"/>
-            </a:solidFill>
-          </a:ln>
-        </p:spPr>
-        <p:style>
-          <a:lnRef idx="2">
-            <a:schemeClr val="accent1">
-              <a:shade val="50000"/>
-            </a:schemeClr>
-          </a:lnRef>
-          <a:fillRef idx="1">
-            <a:schemeClr val="accent1"/>
-          </a:fillRef>
-          <a:effectRef idx="0">
-            <a:schemeClr val="accent1"/>
-          </a:effectRef>
-          <a:fontRef idx="minor">
-            <a:schemeClr val="lt1"/>
-          </a:fontRef>
-        </p:style>
-        <p:txBody>
-          <a:bodyPr lIns="502920" tIns="91440"/>
-          <a:lstStyle/>
-          <a:p>
-            <a:pPr eaLnBrk="1" fontAlgn="auto" hangingPunct="1">
-              <a:spcBef>
-                <a:spcPts val="0"/>
-              </a:spcBef>
-              <a:spcAft>
-                <a:spcPts val="0"/>
-              </a:spcAft>
-              <a:defRPr/>
-            </a:pPr>
-            <a:r>
-              <a:rPr lang="en-US" sz="1050" dirty="0" err="1">
+            <a:ln w="15875">
+              <a:solidFill>
+                <a:srgbClr val="8C4FFF"/>
+              </a:solidFill>
+            </a:ln>
+          </p:spPr>
+          <p:style>
+            <a:lnRef idx="2">
+              <a:schemeClr val="accent1">
+                <a:shade val="50000"/>
+              </a:schemeClr>
+            </a:lnRef>
+            <a:fillRef idx="1">
+              <a:schemeClr val="accent1"/>
+            </a:fillRef>
+            <a:effectRef idx="0">
+              <a:schemeClr val="accent1"/>
+            </a:effectRef>
+            <a:fontRef idx="minor">
+              <a:schemeClr val="lt1"/>
+            </a:fontRef>
+          </p:style>
+          <p:txBody>
+            <a:bodyPr lIns="502920" tIns="91440"/>
+            <a:lstStyle/>
+            <a:p>
+              <a:pPr eaLnBrk="1" fontAlgn="auto" hangingPunct="1">
+                <a:spcBef>
+                  <a:spcPts val="0"/>
+                </a:spcBef>
+                <a:spcAft>
+                  <a:spcPts val="0"/>
+                </a:spcAft>
+                <a:defRPr/>
+              </a:pPr>
+              <a:r>
+                <a:rPr lang="en-US" sz="1050" dirty="0">
+                  <a:ln w="0"/>
+                  <a:solidFill>
+                    <a:schemeClr val="tx1"/>
+                  </a:solidFill>
+                  <a:latin typeface="Arial" panose="020B0604020202020204" pitchFamily="34" charset="0"/>
+                  <a:cs typeface="Arial" panose="020B0604020202020204" pitchFamily="34" charset="0"/>
+                </a:rPr>
+                <a:t>データベースサーバ VPC</a:t>
+              </a:r>
+            </a:p>
+          </p:txBody>
+        </p:sp>
+        <p:pic>
+          <p:nvPicPr>
+            <p:cNvPr id="34" name="Graphic 40" descr="VPC group icon. ">
+              <a:extLst>
+                <a:ext uri="{FF2B5EF4-FFF2-40B4-BE49-F238E27FC236}">
+                  <a16:creationId xmlns:a16="http://schemas.microsoft.com/office/drawing/2014/main" id="{B98F45AB-FE28-918B-0127-5A35672D635F}"/>
+                </a:ext>
+              </a:extLst>
+            </p:cNvPr>
+            <p:cNvPicPr>
+              <a:picLocks noChangeAspect="1"/>
+            </p:cNvPicPr>
+            <p:nvPr/>
+          </p:nvPicPr>
+          <p:blipFill>
+            <a:blip>
+              <a:extLst>
+                <a:ext uri="{96DAC541-7B7A-43D3-8B79-37D633B846F1}">
+                  <asvg:svgBlip xmlns:asvg="http://schemas.microsoft.com/office/drawing/2016/SVG/main" r:embed="rId4"/>
+                </a:ext>
+              </a:extLst>
+            </a:blip>
+            <a:srcRect/>
+            <a:stretch/>
+          </p:blipFill>
+          <p:spPr>
+            <a:xfrm>
+              <a:off x="3641764" y="2275231"/>
+              <a:ext cx="381000" cy="381000"/>
+            </a:xfrm>
+            <a:prstGeom prst="rect">
+              <a:avLst/>
+            </a:prstGeom>
+          </p:spPr>
+        </p:pic>
+        <p:sp>
+          <p:nvSpPr>
+            <p:cNvPr id="51" name="Rectangle 42">
+              <a:extLst>
+                <a:ext uri="{FF2B5EF4-FFF2-40B4-BE49-F238E27FC236}">
+                  <a16:creationId xmlns:a16="http://schemas.microsoft.com/office/drawing/2014/main" id="{D98E2709-5B72-3A20-65AB-0D5ED9699975}"/>
+                </a:ext>
+              </a:extLst>
+            </p:cNvPr>
+            <p:cNvSpPr/>
+            <p:nvPr/>
+          </p:nvSpPr>
+          <p:spPr>
+            <a:xfrm>
+              <a:off x="4022764" y="2752816"/>
+              <a:ext cx="5368001" cy="2520000"/>
+            </a:xfrm>
+            <a:prstGeom prst="rect">
+              <a:avLst/>
+            </a:prstGeom>
+            <a:noFill/>
+            <a:ln w="15875">
+              <a:solidFill>
+                <a:srgbClr val="00A4A6"/>
+              </a:solidFill>
+              <a:prstDash val="solid"/>
+            </a:ln>
+          </p:spPr>
+          <p:style>
+            <a:lnRef idx="2">
+              <a:schemeClr val="accent1">
+                <a:shade val="50000"/>
+              </a:schemeClr>
+            </a:lnRef>
+            <a:fillRef idx="1">
+              <a:schemeClr val="accent1"/>
+            </a:fillRef>
+            <a:effectRef idx="0">
+              <a:schemeClr val="accent1"/>
+            </a:effectRef>
+            <a:fontRef idx="minor">
+              <a:schemeClr val="lt1"/>
+            </a:fontRef>
+          </p:style>
+          <p:txBody>
+            <a:bodyPr wrap="none" lIns="502920" tIns="91440" bIns="45720"/>
+            <a:lstStyle/>
+            <a:p>
+              <a:pPr eaLnBrk="1" fontAlgn="auto" hangingPunct="1">
+                <a:spcBef>
+                  <a:spcPts val="0"/>
+                </a:spcBef>
+                <a:spcAft>
+                  <a:spcPts val="0"/>
+                </a:spcAft>
+                <a:defRPr/>
+              </a:pPr>
+              <a:r>
+                <a:rPr lang="en-US" sz="1050" dirty="0">
+                  <a:solidFill>
+                    <a:schemeClr val="tx1"/>
+                  </a:solidFill>
+                  <a:latin typeface="Arial" panose="020B0604020202020204" pitchFamily="34" charset="0"/>
+                  <a:cs typeface="Arial" panose="020B0604020202020204" pitchFamily="34" charset="0"/>
+                </a:rPr>
+                <a:t>Private subnet</a:t>
+              </a:r>
+            </a:p>
+          </p:txBody>
+        </p:sp>
+        <p:pic>
+          <p:nvPicPr>
+            <p:cNvPr id="52" name="Graphic 43" descr="Private subnet group icon. ">
+              <a:extLst>
+                <a:ext uri="{FF2B5EF4-FFF2-40B4-BE49-F238E27FC236}">
+                  <a16:creationId xmlns:a16="http://schemas.microsoft.com/office/drawing/2014/main" id="{0FDDF2C1-24E6-2F63-6F96-72A8059E10AA}"/>
+                </a:ext>
+              </a:extLst>
+            </p:cNvPr>
+            <p:cNvPicPr>
+              <a:picLocks noChangeAspect="1"/>
+            </p:cNvPicPr>
+            <p:nvPr/>
+          </p:nvPicPr>
+          <p:blipFill>
+            <a:blip>
+              <a:extLst>
+                <a:ext uri="{96DAC541-7B7A-43D3-8B79-37D633B846F1}">
+                  <asvg:svgBlip xmlns:asvg="http://schemas.microsoft.com/office/drawing/2016/SVG/main" r:embed="rId5"/>
+                </a:ext>
+              </a:extLst>
+            </a:blip>
+            <a:srcRect/>
+            <a:stretch/>
+          </p:blipFill>
+          <p:spPr>
+            <a:xfrm>
+              <a:off x="4027688" y="2752815"/>
+              <a:ext cx="381000" cy="381000"/>
+            </a:xfrm>
+            <a:prstGeom prst="rect">
+              <a:avLst/>
+            </a:prstGeom>
+          </p:spPr>
+        </p:pic>
+        <p:sp>
+          <p:nvSpPr>
+            <p:cNvPr id="59" name="Rectangle 59">
+              <a:extLst>
+                <a:ext uri="{FF2B5EF4-FFF2-40B4-BE49-F238E27FC236}">
+                  <a16:creationId xmlns:a16="http://schemas.microsoft.com/office/drawing/2014/main" id="{0C71B32B-E04C-1835-CA77-EB4A9A98C908}"/>
+                </a:ext>
+              </a:extLst>
+            </p:cNvPr>
+            <p:cNvSpPr/>
+            <p:nvPr/>
+          </p:nvSpPr>
+          <p:spPr>
+            <a:xfrm>
+              <a:off x="5072103" y="3244476"/>
+              <a:ext cx="2880000" cy="1800000"/>
+            </a:xfrm>
+            <a:prstGeom prst="rect">
+              <a:avLst/>
+            </a:prstGeom>
+            <a:noFill/>
+            <a:ln w="15875">
+              <a:solidFill>
+                <a:srgbClr val="ED7100"/>
+              </a:solidFill>
+            </a:ln>
+          </p:spPr>
+          <p:style>
+            <a:lnRef idx="2">
+              <a:schemeClr val="accent1">
+                <a:shade val="50000"/>
+              </a:schemeClr>
+            </a:lnRef>
+            <a:fillRef idx="1">
+              <a:schemeClr val="accent1"/>
+            </a:fillRef>
+            <a:effectRef idx="0">
+              <a:schemeClr val="accent1"/>
+            </a:effectRef>
+            <a:fontRef idx="minor">
+              <a:schemeClr val="lt1"/>
+            </a:fontRef>
+          </p:style>
+          <p:txBody>
+            <a:bodyPr wrap="none" lIns="502920" tIns="91440"/>
+            <a:lstStyle/>
+            <a:p>
+              <a:pPr>
+                <a:defRPr/>
+              </a:pPr>
+              <a:r>
+                <a:rPr lang="en-US" altLang="ja-JP" sz="1050" dirty="0">
+                  <a:ln w="0"/>
+                  <a:solidFill>
+                    <a:schemeClr val="tx1"/>
+                  </a:solidFill>
+                  <a:latin typeface="Arial" panose="020B0604020202020204" pitchFamily="34" charset="0"/>
+                  <a:cs typeface="Arial" panose="020B0604020202020204" pitchFamily="34" charset="0"/>
+                </a:rPr>
+                <a:t>EC2</a:t>
+              </a:r>
+            </a:p>
+            <a:p>
+              <a:pPr>
+                <a:defRPr/>
+              </a:pPr>
+              <a:r>
+                <a:rPr lang="en-US" altLang="ja-JP" sz="1050" dirty="0">
+                  <a:ln w="0"/>
+                  <a:solidFill>
+                    <a:schemeClr val="tx1"/>
+                  </a:solidFill>
+                  <a:latin typeface="Arial" panose="020B0604020202020204" pitchFamily="34" charset="0"/>
+                  <a:cs typeface="Arial" panose="020B0604020202020204" pitchFamily="34" charset="0"/>
+                </a:rPr>
+                <a:t>SQL Converter Agent </a:t>
+              </a:r>
+              <a:r>
+                <a:rPr lang="ja-JP" altLang="en-US" sz="1050">
+                  <a:ln w="0"/>
+                  <a:solidFill>
+                    <a:schemeClr val="tx1"/>
+                  </a:solidFill>
+                  <a:latin typeface="Arial" panose="020B0604020202020204" pitchFamily="34" charset="0"/>
+                  <a:cs typeface="Arial" panose="020B0604020202020204" pitchFamily="34" charset="0"/>
+                </a:rPr>
+                <a:t>サーバ</a:t>
+              </a:r>
+              <a:endParaRPr lang="en-US" altLang="ja-JP" sz="1050" dirty="0">
                 <a:ln w="0"/>
                 <a:solidFill>
                   <a:schemeClr val="tx1"/>
                 </a:solidFill>
                 <a:latin typeface="Arial" panose="020B0604020202020204" pitchFamily="34" charset="0"/>
                 <a:cs typeface="Arial" panose="020B0604020202020204" pitchFamily="34" charset="0"/>
-              </a:rPr>
-              <a:t>データベースサーバ</a:t>
-            </a:r>
-            <a:r>
-              <a:rPr lang="en-US" sz="1050" dirty="0">
+              </a:endParaRPr>
+            </a:p>
+          </p:txBody>
+        </p:sp>
+        <p:pic>
+          <p:nvPicPr>
+            <p:cNvPr id="60" name="Graphic 61439" descr="EC2 instance contents group icon. ">
+              <a:extLst>
+                <a:ext uri="{FF2B5EF4-FFF2-40B4-BE49-F238E27FC236}">
+                  <a16:creationId xmlns:a16="http://schemas.microsoft.com/office/drawing/2014/main" id="{AC5F2091-080C-2631-31BA-58B8E9C91761}"/>
+                </a:ext>
+              </a:extLst>
+            </p:cNvPr>
+            <p:cNvPicPr>
+              <a:picLocks noChangeAspect="1"/>
+            </p:cNvPicPr>
+            <p:nvPr/>
+          </p:nvPicPr>
+          <p:blipFill>
+            <a:blip>
+              <a:extLst>
+                <a:ext uri="{96DAC541-7B7A-43D3-8B79-37D633B846F1}">
+                  <asvg:svgBlip xmlns:asvg="http://schemas.microsoft.com/office/drawing/2016/SVG/main" r:embed="rId6"/>
+                </a:ext>
+              </a:extLst>
+            </a:blip>
+            <a:srcRect/>
+            <a:stretch/>
+          </p:blipFill>
+          <p:spPr>
+            <a:xfrm>
+              <a:off x="5072107" y="3244481"/>
+              <a:ext cx="381000" cy="381000"/>
+            </a:xfrm>
+            <a:prstGeom prst="rect">
+              <a:avLst/>
+            </a:prstGeom>
+          </p:spPr>
+        </p:pic>
+        <p:pic>
+          <p:nvPicPr>
+            <p:cNvPr id="61" name="Graphic 7" descr="Amazon Aurora service icon.">
+              <a:extLst>
+                <a:ext uri="{FF2B5EF4-FFF2-40B4-BE49-F238E27FC236}">
+                  <a16:creationId xmlns:a16="http://schemas.microsoft.com/office/drawing/2014/main" id="{A24A1DDC-2AAB-DC5A-01D9-927F9EA5FBA0}"/>
+                </a:ext>
+              </a:extLst>
+            </p:cNvPr>
+            <p:cNvPicPr>
+              <a:picLocks noChangeAspect="1" noChangeArrowheads="1"/>
+            </p:cNvPicPr>
+            <p:nvPr/>
+          </p:nvPicPr>
+          <p:blipFill>
+            <a:blip>
+              <a:extLst>
+                <a:ext uri="{96DAC541-7B7A-43D3-8B79-37D633B846F1}">
+                  <asvg:svgBlip xmlns:asvg="http://schemas.microsoft.com/office/drawing/2016/SVG/main" r:embed="rId7"/>
+                </a:ext>
+              </a:extLst>
+            </a:blip>
+            <a:srcRect/>
+            <a:stretch/>
+          </p:blipFill>
+          <p:spPr bwMode="auto">
+            <a:xfrm>
+              <a:off x="8490765" y="3797091"/>
+              <a:ext cx="432000" cy="432000"/>
+            </a:xfrm>
+            <a:prstGeom prst="rect">
+              <a:avLst/>
+            </a:prstGeom>
+            <a:noFill/>
+            <a:ln>
+              <a:noFill/>
+            </a:ln>
+            <a:extLst>
+              <a:ext uri="{909E8E84-426E-40DD-AFC4-6F175D3DCCD1}">
+                <a14:hiddenFill xmlns:a14="http://schemas.microsoft.com/office/drawing/2010/main">
+                  <a:solidFill>
+                    <a:srgbClr val="FFFFFF"/>
+                  </a:solidFill>
+                </a14:hiddenFill>
+              </a:ext>
+              <a:ext uri="{91240B29-F687-4F45-9708-019B960494DF}">
+                <a14:hiddenLine xmlns:a14="http://schemas.microsoft.com/office/drawing/2010/main" w="9525">
+                  <a:solidFill>
+                    <a:srgbClr val="000000"/>
+                  </a:solidFill>
+                  <a:miter lim="800000"/>
+                  <a:headEnd/>
+                  <a:tailEnd/>
+                </a14:hiddenLine>
+              </a:ext>
+            </a:extLst>
+          </p:spPr>
+        </p:pic>
+        <p:sp>
+          <p:nvSpPr>
+            <p:cNvPr id="62" name="TextBox 9">
+              <a:extLst>
+                <a:ext uri="{FF2B5EF4-FFF2-40B4-BE49-F238E27FC236}">
+                  <a16:creationId xmlns:a16="http://schemas.microsoft.com/office/drawing/2014/main" id="{FB96533C-A33A-742D-7473-7C156DB473FE}"/>
+                </a:ext>
+              </a:extLst>
+            </p:cNvPr>
+            <p:cNvSpPr txBox="1">
+              <a:spLocks noChangeArrowheads="1"/>
+            </p:cNvSpPr>
+            <p:nvPr/>
+          </p:nvSpPr>
+          <p:spPr bwMode="auto">
+            <a:xfrm>
+              <a:off x="7995134" y="4238432"/>
+              <a:ext cx="1414190" cy="367646"/>
+            </a:xfrm>
+            <a:prstGeom prst="rect">
+              <a:avLst/>
+            </a:prstGeom>
+            <a:noFill/>
+            <a:ln>
+              <a:noFill/>
+            </a:ln>
+            <a:extLst>
+              <a:ext uri="{909E8E84-426E-40DD-AFC4-6F175D3DCCD1}">
+                <a14:hiddenFill xmlns:a14="http://schemas.microsoft.com/office/drawing/2010/main">
+                  <a:solidFill>
+                    <a:srgbClr val="FFFFFF"/>
+                  </a:solidFill>
+                </a14:hiddenFill>
+              </a:ext>
+              <a:ext uri="{91240B29-F687-4F45-9708-019B960494DF}">
+                <a14:hiddenLine xmlns:a14="http://schemas.microsoft.com/office/drawing/2010/main" w="9525">
+                  <a:solidFill>
+                    <a:srgbClr val="000000"/>
+                  </a:solidFill>
+                  <a:miter lim="800000"/>
+                  <a:headEnd/>
+                  <a:tailEnd/>
+                </a14:hiddenLine>
+              </a:ext>
+            </a:extLst>
+          </p:spPr>
+          <p:txBody>
+            <a:bodyPr wrap="square">
+              <a:spAutoFit/>
+            </a:bodyPr>
+            <a:lstStyle>
+              <a:lvl1pPr>
+                <a:defRPr>
+                  <a:solidFill>
+                    <a:schemeClr val="tx1"/>
+                  </a:solidFill>
+                  <a:latin typeface="Calibri" panose="020F0502020204030204" pitchFamily="34" charset="0"/>
+                </a:defRPr>
+              </a:lvl1pPr>
+              <a:lvl2pPr marL="742950" indent="-285750">
+                <a:defRPr>
+                  <a:solidFill>
+                    <a:schemeClr val="tx1"/>
+                  </a:solidFill>
+                  <a:latin typeface="Calibri" panose="020F0502020204030204" pitchFamily="34" charset="0"/>
+                </a:defRPr>
+              </a:lvl2pPr>
+              <a:lvl3pPr marL="1143000" indent="-228600">
+                <a:defRPr>
+                  <a:solidFill>
+                    <a:schemeClr val="tx1"/>
+                  </a:solidFill>
+                  <a:latin typeface="Calibri" panose="020F0502020204030204" pitchFamily="34" charset="0"/>
+                </a:defRPr>
+              </a:lvl3pPr>
+              <a:lvl4pPr marL="1600200" indent="-228600">
+                <a:defRPr>
+                  <a:solidFill>
+                    <a:schemeClr val="tx1"/>
+                  </a:solidFill>
+                  <a:latin typeface="Calibri" panose="020F0502020204030204" pitchFamily="34" charset="0"/>
+                </a:defRPr>
+              </a:lvl4pPr>
+              <a:lvl5pPr marL="2057400" indent="-228600">
+                <a:defRPr>
+                  <a:solidFill>
+                    <a:schemeClr val="tx1"/>
+                  </a:solidFill>
+                  <a:latin typeface="Calibri" panose="020F0502020204030204" pitchFamily="34" charset="0"/>
+                </a:defRPr>
+              </a:lvl5pPr>
+              <a:lvl6pPr marL="2514600" indent="-228600" eaLnBrk="0" fontAlgn="base" hangingPunct="0">
+                <a:spcBef>
+                  <a:spcPct val="0"/>
+                </a:spcBef>
+                <a:spcAft>
+                  <a:spcPct val="0"/>
+                </a:spcAft>
+                <a:defRPr>
+                  <a:solidFill>
+                    <a:schemeClr val="tx1"/>
+                  </a:solidFill>
+                  <a:latin typeface="Calibri" panose="020F0502020204030204" pitchFamily="34" charset="0"/>
+                </a:defRPr>
+              </a:lvl6pPr>
+              <a:lvl7pPr marL="2971800" indent="-228600" eaLnBrk="0" fontAlgn="base" hangingPunct="0">
+                <a:spcBef>
+                  <a:spcPct val="0"/>
+                </a:spcBef>
+                <a:spcAft>
+                  <a:spcPct val="0"/>
+                </a:spcAft>
+                <a:defRPr>
+                  <a:solidFill>
+                    <a:schemeClr val="tx1"/>
+                  </a:solidFill>
+                  <a:latin typeface="Calibri" panose="020F0502020204030204" pitchFamily="34" charset="0"/>
+                </a:defRPr>
+              </a:lvl7pPr>
+              <a:lvl8pPr marL="3429000" indent="-228600" eaLnBrk="0" fontAlgn="base" hangingPunct="0">
+                <a:spcBef>
+                  <a:spcPct val="0"/>
+                </a:spcBef>
+                <a:spcAft>
+                  <a:spcPct val="0"/>
+                </a:spcAft>
+                <a:defRPr>
+                  <a:solidFill>
+                    <a:schemeClr val="tx1"/>
+                  </a:solidFill>
+                  <a:latin typeface="Calibri" panose="020F0502020204030204" pitchFamily="34" charset="0"/>
+                </a:defRPr>
+              </a:lvl8pPr>
+              <a:lvl9pPr marL="3886200" indent="-228600" eaLnBrk="0" fontAlgn="base" hangingPunct="0">
+                <a:spcBef>
+                  <a:spcPct val="0"/>
+                </a:spcBef>
+                <a:spcAft>
+                  <a:spcPct val="0"/>
+                </a:spcAft>
+                <a:defRPr>
+                  <a:solidFill>
+                    <a:schemeClr val="tx1"/>
+                  </a:solidFill>
+                  <a:latin typeface="Calibri" panose="020F0502020204030204" pitchFamily="34" charset="0"/>
+                </a:defRPr>
+              </a:lvl9pPr>
+            </a:lstStyle>
+            <a:p>
+              <a:pPr algn="ctr" eaLnBrk="1" hangingPunct="1"/>
+              <a:r>
+                <a:rPr lang="en-US" altLang="en-US" sz="1050" dirty="0">
+                  <a:latin typeface="Arial" panose="020B0604020202020204" pitchFamily="34" charset="0"/>
+                  <a:ea typeface="Amazon Ember" panose="020B0603020204020204" pitchFamily="34" charset="0"/>
+                  <a:cs typeface="Arial" panose="020B0604020202020204" pitchFamily="34" charset="0"/>
+                </a:rPr>
+                <a:t>Amazon Aurora</a:t>
+              </a:r>
+            </a:p>
+            <a:p>
+              <a:pPr algn="ctr" eaLnBrk="1" hangingPunct="1"/>
+              <a:r>
+                <a:rPr lang="en-US" altLang="en-US" sz="1050" dirty="0">
+                  <a:latin typeface="Arial" panose="020B0604020202020204" pitchFamily="34" charset="0"/>
+                  <a:ea typeface="Amazon Ember" panose="020B0603020204020204" pitchFamily="34" charset="0"/>
+                  <a:cs typeface="Arial" panose="020B0604020202020204" pitchFamily="34" charset="0"/>
+                </a:rPr>
+                <a:t>PostgreSQL</a:t>
+              </a:r>
+            </a:p>
+          </p:txBody>
+        </p:sp>
+        <p:sp>
+          <p:nvSpPr>
+            <p:cNvPr id="66" name="角丸四角形 65">
+              <a:extLst>
+                <a:ext uri="{FF2B5EF4-FFF2-40B4-BE49-F238E27FC236}">
+                  <a16:creationId xmlns:a16="http://schemas.microsoft.com/office/drawing/2014/main" id="{A8A0C8BF-BAA1-E314-6A68-380AEC5A28BE}"/>
+                </a:ext>
+              </a:extLst>
+            </p:cNvPr>
+            <p:cNvSpPr/>
+            <p:nvPr/>
+          </p:nvSpPr>
+          <p:spPr>
+            <a:xfrm>
+              <a:off x="5170418" y="3811995"/>
+              <a:ext cx="900000" cy="396000"/>
+            </a:xfrm>
+            <a:prstGeom prst="roundRect">
+              <a:avLst/>
+            </a:prstGeom>
+            <a:noFill/>
+            <a:ln>
+              <a:solidFill>
+                <a:schemeClr val="tx1"/>
+              </a:solidFill>
+            </a:ln>
+          </p:spPr>
+          <p:style>
+            <a:lnRef idx="2">
+              <a:schemeClr val="accent1">
+                <a:shade val="50000"/>
+              </a:schemeClr>
+            </a:lnRef>
+            <a:fillRef idx="1">
+              <a:schemeClr val="accent1"/>
+            </a:fillRef>
+            <a:effectRef idx="0">
+              <a:schemeClr val="accent1"/>
+            </a:effectRef>
+            <a:fontRef idx="minor">
+              <a:schemeClr val="lt1"/>
+            </a:fontRef>
+          </p:style>
+          <p:txBody>
+            <a:bodyPr rtlCol="0" anchor="ctr"/>
+            <a:lstStyle/>
+            <a:p>
+              <a:pPr algn="ctr"/>
+              <a:r>
+                <a:rPr kumimoji="1" lang="en-US" altLang="ja-JP" sz="1100" dirty="0"/>
+                <a:t>Skill</a:t>
+              </a:r>
+              <a:endParaRPr kumimoji="1" lang="ja-JP" altLang="en-US" sz="1100" dirty="0" err="1"/>
+            </a:p>
+          </p:txBody>
+        </p:sp>
+        <p:sp>
+          <p:nvSpPr>
+            <p:cNvPr id="67" name="角丸四角形 66">
+              <a:extLst>
+                <a:ext uri="{FF2B5EF4-FFF2-40B4-BE49-F238E27FC236}">
+                  <a16:creationId xmlns:a16="http://schemas.microsoft.com/office/drawing/2014/main" id="{B884FDD3-9565-BFE6-FD06-6BFAD329ECFF}"/>
+                </a:ext>
+              </a:extLst>
+            </p:cNvPr>
+            <p:cNvSpPr/>
+            <p:nvPr/>
+          </p:nvSpPr>
+          <p:spPr>
+            <a:xfrm>
+              <a:off x="5172640" y="4490734"/>
+              <a:ext cx="900000" cy="396000"/>
+            </a:xfrm>
+            <a:prstGeom prst="roundRect">
+              <a:avLst/>
+            </a:prstGeom>
+            <a:noFill/>
+            <a:ln>
+              <a:solidFill>
+                <a:schemeClr val="tx1"/>
+              </a:solidFill>
+            </a:ln>
+          </p:spPr>
+          <p:style>
+            <a:lnRef idx="2">
+              <a:schemeClr val="accent1">
+                <a:shade val="50000"/>
+              </a:schemeClr>
+            </a:lnRef>
+            <a:fillRef idx="1">
+              <a:schemeClr val="accent1"/>
+            </a:fillRef>
+            <a:effectRef idx="0">
+              <a:schemeClr val="accent1"/>
+            </a:effectRef>
+            <a:fontRef idx="minor">
+              <a:schemeClr val="lt1"/>
+            </a:fontRef>
+          </p:style>
+          <p:txBody>
+            <a:bodyPr rtlCol="0" anchor="ctr"/>
+            <a:lstStyle/>
+            <a:p>
+              <a:pPr algn="ctr"/>
+              <a:r>
+                <a:rPr kumimoji="1" lang="en-US" altLang="ja-JP" sz="1100" dirty="0"/>
+                <a:t>Kiro CLI</a:t>
+              </a:r>
+              <a:endParaRPr kumimoji="1" lang="ja-JP" altLang="en-US" sz="1100" dirty="0" err="1"/>
+            </a:p>
+          </p:txBody>
+        </p:sp>
+        <p:sp>
+          <p:nvSpPr>
+            <p:cNvPr id="68" name="角丸四角形 67">
+              <a:extLst>
+                <a:ext uri="{FF2B5EF4-FFF2-40B4-BE49-F238E27FC236}">
+                  <a16:creationId xmlns:a16="http://schemas.microsoft.com/office/drawing/2014/main" id="{39E0B328-1AF5-8D3B-15DF-4640FAFFE5EC}"/>
+                </a:ext>
+              </a:extLst>
+            </p:cNvPr>
+            <p:cNvSpPr/>
+            <p:nvPr/>
+          </p:nvSpPr>
+          <p:spPr>
+            <a:xfrm>
+              <a:off x="6562452" y="3820943"/>
+              <a:ext cx="252000" cy="1080000"/>
+            </a:xfrm>
+            <a:prstGeom prst="roundRect">
+              <a:avLst/>
+            </a:prstGeom>
+            <a:noFill/>
+            <a:ln>
+              <a:solidFill>
+                <a:schemeClr val="tx1"/>
+              </a:solidFill>
+            </a:ln>
+          </p:spPr>
+          <p:style>
+            <a:lnRef idx="2">
+              <a:schemeClr val="accent1">
+                <a:shade val="50000"/>
+              </a:schemeClr>
+            </a:lnRef>
+            <a:fillRef idx="1">
+              <a:schemeClr val="accent1"/>
+            </a:fillRef>
+            <a:effectRef idx="0">
+              <a:schemeClr val="accent1"/>
+            </a:effectRef>
+            <a:fontRef idx="minor">
+              <a:schemeClr val="lt1"/>
+            </a:fontRef>
+          </p:style>
+          <p:txBody>
+            <a:bodyPr vert="eaVert" rtlCol="0" anchor="ctr"/>
+            <a:lstStyle/>
+            <a:p>
+              <a:pPr algn="ctr"/>
+              <a:r>
+                <a:rPr kumimoji="1" lang="en-US" altLang="ja-JP" sz="1100" dirty="0"/>
+                <a:t>MCP Server</a:t>
+              </a:r>
+              <a:endParaRPr kumimoji="1" lang="ja-JP" altLang="en-US" sz="1100" dirty="0" err="1"/>
+            </a:p>
+          </p:txBody>
+        </p:sp>
+        <p:sp>
+          <p:nvSpPr>
+            <p:cNvPr id="70" name="円柱 69">
+              <a:extLst>
+                <a:ext uri="{FF2B5EF4-FFF2-40B4-BE49-F238E27FC236}">
+                  <a16:creationId xmlns:a16="http://schemas.microsoft.com/office/drawing/2014/main" id="{057A7E8D-F7D2-D9A0-0D0C-78848D699BA9}"/>
+                </a:ext>
+              </a:extLst>
+            </p:cNvPr>
+            <p:cNvSpPr/>
+            <p:nvPr/>
+          </p:nvSpPr>
+          <p:spPr>
+            <a:xfrm>
+              <a:off x="7277614" y="4334573"/>
+              <a:ext cx="540000" cy="576000"/>
+            </a:xfrm>
+            <a:prstGeom prst="can">
+              <a:avLst/>
+            </a:prstGeom>
+            <a:noFill/>
+            <a:ln>
+              <a:solidFill>
+                <a:schemeClr val="tx1"/>
+              </a:solidFill>
+            </a:ln>
+          </p:spPr>
+          <p:style>
+            <a:lnRef idx="2">
+              <a:schemeClr val="accent1">
+                <a:shade val="50000"/>
+              </a:schemeClr>
+            </a:lnRef>
+            <a:fillRef idx="1">
+              <a:schemeClr val="accent1"/>
+            </a:fillRef>
+            <a:effectRef idx="0">
+              <a:schemeClr val="accent1"/>
+            </a:effectRef>
+            <a:fontRef idx="minor">
+              <a:schemeClr val="lt1"/>
+            </a:fontRef>
+          </p:style>
+          <p:txBody>
+            <a:bodyPr wrap="none" rtlCol="0" anchor="ctr"/>
+            <a:lstStyle/>
+            <a:p>
+              <a:pPr algn="ctr"/>
+              <a:r>
+                <a:rPr kumimoji="1" lang="en-US" altLang="ja-JP" sz="1000" dirty="0"/>
+                <a:t>Oracle</a:t>
+              </a:r>
+            </a:p>
+            <a:p>
+              <a:pPr algn="ctr"/>
+              <a:r>
+                <a:rPr kumimoji="1" lang="en-US" altLang="ja-JP" sz="1000" dirty="0"/>
+                <a:t>DB</a:t>
+              </a:r>
+              <a:endParaRPr kumimoji="1" lang="ja-JP" altLang="en-US" sz="1000" dirty="0" err="1"/>
+            </a:p>
+          </p:txBody>
+        </p:sp>
+        <p:cxnSp>
+          <p:nvCxnSpPr>
+            <p:cNvPr id="76" name="直線矢印コネクタ 75">
+              <a:extLst>
+                <a:ext uri="{FF2B5EF4-FFF2-40B4-BE49-F238E27FC236}">
+                  <a16:creationId xmlns:a16="http://schemas.microsoft.com/office/drawing/2014/main" id="{1494CD6B-D975-600C-E667-FA68F91B111F}"/>
+                </a:ext>
+              </a:extLst>
+            </p:cNvPr>
+            <p:cNvCxnSpPr>
+              <a:cxnSpLocks/>
+              <a:endCxn id="4" idx="1"/>
+            </p:cNvCxnSpPr>
+            <p:nvPr/>
+          </p:nvCxnSpPr>
+          <p:spPr>
+            <a:xfrm>
+              <a:off x="1964621" y="4331927"/>
+              <a:ext cx="675055" cy="0"/>
+            </a:xfrm>
+            <a:prstGeom prst="straightConnector1">
+              <a:avLst/>
+            </a:prstGeom>
+            <a:ln w="19050" cap="rnd">
+              <a:solidFill>
+                <a:schemeClr val="tx1"/>
+              </a:solidFill>
+              <a:tailEnd type="triangle"/>
+            </a:ln>
+          </p:spPr>
+          <p:style>
+            <a:lnRef idx="1">
+              <a:schemeClr val="accent1"/>
+            </a:lnRef>
+            <a:fillRef idx="0">
+              <a:schemeClr val="accent1"/>
+            </a:fillRef>
+            <a:effectRef idx="0">
+              <a:schemeClr val="accent1"/>
+            </a:effectRef>
+            <a:fontRef idx="minor">
+              <a:schemeClr val="tx1"/>
+            </a:fontRef>
+          </p:style>
+        </p:cxnSp>
+        <p:cxnSp>
+          <p:nvCxnSpPr>
+            <p:cNvPr id="79" name="直線矢印コネクタ 78">
+              <a:extLst>
+                <a:ext uri="{FF2B5EF4-FFF2-40B4-BE49-F238E27FC236}">
+                  <a16:creationId xmlns:a16="http://schemas.microsoft.com/office/drawing/2014/main" id="{78321E9C-121B-886A-25CE-7D5154C0C2DC}"/>
+                </a:ext>
+              </a:extLst>
+            </p:cNvPr>
+            <p:cNvCxnSpPr>
+              <a:cxnSpLocks/>
+              <a:stCxn id="66" idx="2"/>
+              <a:endCxn id="67" idx="0"/>
+            </p:cNvCxnSpPr>
+            <p:nvPr/>
+          </p:nvCxnSpPr>
+          <p:spPr>
+            <a:xfrm>
+              <a:off x="5620418" y="4207996"/>
+              <a:ext cx="2222" cy="282738"/>
+            </a:xfrm>
+            <a:prstGeom prst="straightConnector1">
+              <a:avLst/>
+            </a:prstGeom>
+            <a:ln w="19050" cap="rnd">
+              <a:solidFill>
+                <a:schemeClr val="tx1"/>
+              </a:solidFill>
+              <a:tailEnd type="triangle"/>
+            </a:ln>
+          </p:spPr>
+          <p:style>
+            <a:lnRef idx="1">
+              <a:schemeClr val="accent1"/>
+            </a:lnRef>
+            <a:fillRef idx="0">
+              <a:schemeClr val="accent1"/>
+            </a:fillRef>
+            <a:effectRef idx="0">
+              <a:schemeClr val="accent1"/>
+            </a:effectRef>
+            <a:fontRef idx="minor">
+              <a:schemeClr val="tx1"/>
+            </a:fontRef>
+          </p:style>
+        </p:cxnSp>
+        <p:cxnSp>
+          <p:nvCxnSpPr>
+            <p:cNvPr id="82" name="直線矢印コネクタ 81">
+              <a:extLst>
+                <a:ext uri="{FF2B5EF4-FFF2-40B4-BE49-F238E27FC236}">
+                  <a16:creationId xmlns:a16="http://schemas.microsoft.com/office/drawing/2014/main" id="{5D9930D2-04BE-1E36-3CC4-A7890FC10B0F}"/>
+                </a:ext>
+              </a:extLst>
+            </p:cNvPr>
+            <p:cNvCxnSpPr>
+              <a:cxnSpLocks/>
+            </p:cNvCxnSpPr>
+            <p:nvPr/>
+          </p:nvCxnSpPr>
+          <p:spPr>
+            <a:xfrm>
+              <a:off x="6092518" y="4688734"/>
+              <a:ext cx="468000" cy="0"/>
+            </a:xfrm>
+            <a:prstGeom prst="straightConnector1">
+              <a:avLst/>
+            </a:prstGeom>
+            <a:ln w="19050" cap="rnd">
+              <a:solidFill>
+                <a:schemeClr val="tx1"/>
+              </a:solidFill>
+              <a:tailEnd type="triangle"/>
+            </a:ln>
+          </p:spPr>
+          <p:style>
+            <a:lnRef idx="1">
+              <a:schemeClr val="accent1"/>
+            </a:lnRef>
+            <a:fillRef idx="0">
+              <a:schemeClr val="accent1"/>
+            </a:fillRef>
+            <a:effectRef idx="0">
+              <a:schemeClr val="accent1"/>
+            </a:effectRef>
+            <a:fontRef idx="minor">
+              <a:schemeClr val="tx1"/>
+            </a:fontRef>
+          </p:style>
+        </p:cxnSp>
+        <p:cxnSp>
+          <p:nvCxnSpPr>
+            <p:cNvPr id="86" name="直線矢印コネクタ 85">
+              <a:extLst>
+                <a:ext uri="{FF2B5EF4-FFF2-40B4-BE49-F238E27FC236}">
+                  <a16:creationId xmlns:a16="http://schemas.microsoft.com/office/drawing/2014/main" id="{BB009A0A-CA29-3898-080B-F67A5ADEC5A2}"/>
+                </a:ext>
+              </a:extLst>
+            </p:cNvPr>
+            <p:cNvCxnSpPr>
+              <a:cxnSpLocks/>
+            </p:cNvCxnSpPr>
+            <p:nvPr/>
+          </p:nvCxnSpPr>
+          <p:spPr>
+            <a:xfrm>
+              <a:off x="6814452" y="3993213"/>
+              <a:ext cx="1658151" cy="0"/>
+            </a:xfrm>
+            <a:prstGeom prst="straightConnector1">
+              <a:avLst/>
+            </a:prstGeom>
+            <a:ln w="19050" cap="rnd">
+              <a:solidFill>
+                <a:schemeClr val="tx1"/>
+              </a:solidFill>
+              <a:tailEnd type="triangle"/>
+            </a:ln>
+          </p:spPr>
+          <p:style>
+            <a:lnRef idx="1">
+              <a:schemeClr val="accent1"/>
+            </a:lnRef>
+            <a:fillRef idx="0">
+              <a:schemeClr val="accent1"/>
+            </a:fillRef>
+            <a:effectRef idx="0">
+              <a:schemeClr val="accent1"/>
+            </a:effectRef>
+            <a:fontRef idx="minor">
+              <a:schemeClr val="tx1"/>
+            </a:fontRef>
+          </p:style>
+        </p:cxnSp>
+        <p:cxnSp>
+          <p:nvCxnSpPr>
+            <p:cNvPr id="93" name="直線矢印コネクタ 92">
+              <a:extLst>
+                <a:ext uri="{FF2B5EF4-FFF2-40B4-BE49-F238E27FC236}">
+                  <a16:creationId xmlns:a16="http://schemas.microsoft.com/office/drawing/2014/main" id="{D4BACEBA-2616-F53B-27F9-3E09E213DD44}"/>
+                </a:ext>
+              </a:extLst>
+            </p:cNvPr>
+            <p:cNvCxnSpPr>
+              <a:cxnSpLocks/>
+            </p:cNvCxnSpPr>
+            <p:nvPr/>
+          </p:nvCxnSpPr>
+          <p:spPr>
+            <a:xfrm>
+              <a:off x="6827853" y="4689510"/>
+              <a:ext cx="468000" cy="0"/>
+            </a:xfrm>
+            <a:prstGeom prst="straightConnector1">
+              <a:avLst/>
+            </a:prstGeom>
+            <a:ln w="19050" cap="rnd">
+              <a:solidFill>
+                <a:schemeClr val="tx1"/>
+              </a:solidFill>
+              <a:tailEnd type="triangle"/>
+            </a:ln>
+          </p:spPr>
+          <p:style>
+            <a:lnRef idx="1">
+              <a:schemeClr val="accent1"/>
+            </a:lnRef>
+            <a:fillRef idx="0">
+              <a:schemeClr val="accent1"/>
+            </a:fillRef>
+            <a:effectRef idx="0">
+              <a:schemeClr val="accent1"/>
+            </a:effectRef>
+            <a:fontRef idx="minor">
+              <a:schemeClr val="tx1"/>
+            </a:fontRef>
+          </p:style>
+        </p:cxnSp>
+        <p:sp>
+          <p:nvSpPr>
+            <p:cNvPr id="95" name="TextBox 30">
+              <a:extLst>
+                <a:ext uri="{FF2B5EF4-FFF2-40B4-BE49-F238E27FC236}">
+                  <a16:creationId xmlns:a16="http://schemas.microsoft.com/office/drawing/2014/main" id="{F942525D-4F4E-0C6C-54F5-28689639BA70}"/>
+                </a:ext>
+              </a:extLst>
+            </p:cNvPr>
+            <p:cNvSpPr txBox="1">
+              <a:spLocks noChangeArrowheads="1"/>
+            </p:cNvSpPr>
+            <p:nvPr/>
+          </p:nvSpPr>
+          <p:spPr bwMode="auto">
+            <a:xfrm>
+              <a:off x="809365" y="3125768"/>
+              <a:ext cx="1135585" cy="253916"/>
+            </a:xfrm>
+            <a:prstGeom prst="rect">
+              <a:avLst/>
+            </a:prstGeom>
+            <a:noFill/>
+            <a:ln>
+              <a:noFill/>
+            </a:ln>
+            <a:extLst>
+              <a:ext uri="{909E8E84-426E-40DD-AFC4-6F175D3DCCD1}">
+                <a14:hiddenFill xmlns:a14="http://schemas.microsoft.com/office/drawing/2010/main">
+                  <a:solidFill>
+                    <a:srgbClr val="FFFFFF"/>
+                  </a:solidFill>
+                </a14:hiddenFill>
+              </a:ext>
+              <a:ext uri="{91240B29-F687-4F45-9708-019B960494DF}">
+                <a14:hiddenLine xmlns:a14="http://schemas.microsoft.com/office/drawing/2010/main" w="9525">
+                  <a:solidFill>
+                    <a:srgbClr val="000000"/>
+                  </a:solidFill>
+                  <a:miter lim="800000"/>
+                  <a:headEnd/>
+                  <a:tailEnd/>
+                </a14:hiddenLine>
+              </a:ext>
+            </a:extLst>
+          </p:spPr>
+          <p:txBody>
+            <a:bodyPr wrap="square">
+              <a:spAutoFit/>
+            </a:bodyPr>
+            <a:lstStyle>
+              <a:lvl1pPr>
+                <a:defRPr>
+                  <a:solidFill>
+                    <a:schemeClr val="tx1"/>
+                  </a:solidFill>
+                  <a:latin typeface="Calibri" panose="020F0502020204030204" pitchFamily="34" charset="0"/>
+                </a:defRPr>
+              </a:lvl1pPr>
+              <a:lvl2pPr marL="742950" indent="-285750">
+                <a:defRPr>
+                  <a:solidFill>
+                    <a:schemeClr val="tx1"/>
+                  </a:solidFill>
+                  <a:latin typeface="Calibri" panose="020F0502020204030204" pitchFamily="34" charset="0"/>
+                </a:defRPr>
+              </a:lvl2pPr>
+              <a:lvl3pPr marL="1143000" indent="-228600">
+                <a:defRPr>
+                  <a:solidFill>
+                    <a:schemeClr val="tx1"/>
+                  </a:solidFill>
+                  <a:latin typeface="Calibri" panose="020F0502020204030204" pitchFamily="34" charset="0"/>
+                </a:defRPr>
+              </a:lvl3pPr>
+              <a:lvl4pPr marL="1600200" indent="-228600">
+                <a:defRPr>
+                  <a:solidFill>
+                    <a:schemeClr val="tx1"/>
+                  </a:solidFill>
+                  <a:latin typeface="Calibri" panose="020F0502020204030204" pitchFamily="34" charset="0"/>
+                </a:defRPr>
+              </a:lvl4pPr>
+              <a:lvl5pPr marL="2057400" indent="-228600">
+                <a:defRPr>
+                  <a:solidFill>
+                    <a:schemeClr val="tx1"/>
+                  </a:solidFill>
+                  <a:latin typeface="Calibri" panose="020F0502020204030204" pitchFamily="34" charset="0"/>
+                </a:defRPr>
+              </a:lvl5pPr>
+              <a:lvl6pPr marL="2514600" indent="-228600" eaLnBrk="0" fontAlgn="base" hangingPunct="0">
+                <a:spcBef>
+                  <a:spcPct val="0"/>
+                </a:spcBef>
+                <a:spcAft>
+                  <a:spcPct val="0"/>
+                </a:spcAft>
+                <a:defRPr>
+                  <a:solidFill>
+                    <a:schemeClr val="tx1"/>
+                  </a:solidFill>
+                  <a:latin typeface="Calibri" panose="020F0502020204030204" pitchFamily="34" charset="0"/>
+                </a:defRPr>
+              </a:lvl6pPr>
+              <a:lvl7pPr marL="2971800" indent="-228600" eaLnBrk="0" fontAlgn="base" hangingPunct="0">
+                <a:spcBef>
+                  <a:spcPct val="0"/>
+                </a:spcBef>
+                <a:spcAft>
+                  <a:spcPct val="0"/>
+                </a:spcAft>
+                <a:defRPr>
+                  <a:solidFill>
+                    <a:schemeClr val="tx1"/>
+                  </a:solidFill>
+                  <a:latin typeface="Calibri" panose="020F0502020204030204" pitchFamily="34" charset="0"/>
+                </a:defRPr>
+              </a:lvl7pPr>
+              <a:lvl8pPr marL="3429000" indent="-228600" eaLnBrk="0" fontAlgn="base" hangingPunct="0">
+                <a:spcBef>
+                  <a:spcPct val="0"/>
+                </a:spcBef>
+                <a:spcAft>
+                  <a:spcPct val="0"/>
+                </a:spcAft>
+                <a:defRPr>
+                  <a:solidFill>
+                    <a:schemeClr val="tx1"/>
+                  </a:solidFill>
+                  <a:latin typeface="Calibri" panose="020F0502020204030204" pitchFamily="34" charset="0"/>
+                </a:defRPr>
+              </a:lvl8pPr>
+              <a:lvl9pPr marL="3886200" indent="-228600" eaLnBrk="0" fontAlgn="base" hangingPunct="0">
+                <a:spcBef>
+                  <a:spcPct val="0"/>
+                </a:spcBef>
+                <a:spcAft>
+                  <a:spcPct val="0"/>
+                </a:spcAft>
+                <a:defRPr>
+                  <a:solidFill>
+                    <a:schemeClr val="tx1"/>
+                  </a:solidFill>
+                  <a:latin typeface="Calibri" panose="020F0502020204030204" pitchFamily="34" charset="0"/>
+                </a:defRPr>
+              </a:lvl9pPr>
+            </a:lstStyle>
+            <a:p>
+              <a:pPr algn="ctr" eaLnBrk="1" hangingPunct="1"/>
+              <a:r>
+                <a:rPr lang="en-US" altLang="en-US" sz="1050" dirty="0">
+                  <a:latin typeface="Arial" panose="020B0604020202020204" pitchFamily="34" charset="0"/>
+                  <a:cs typeface="Arial" panose="020B0604020202020204" pitchFamily="34" charset="0"/>
+                </a:rPr>
+                <a:t>ユーザ</a:t>
+              </a:r>
+            </a:p>
+          </p:txBody>
+        </p:sp>
+        <p:pic>
+          <p:nvPicPr>
+            <p:cNvPr id="4" name="Graphic 6" descr="Endpoint resource icon for the Amazon API Gateway service.">
+              <a:extLst>
+                <a:ext uri="{FF2B5EF4-FFF2-40B4-BE49-F238E27FC236}">
+                  <a16:creationId xmlns:a16="http://schemas.microsoft.com/office/drawing/2014/main" id="{C1A8859B-82F8-F76E-D109-DE287A32E1C0}"/>
+                </a:ext>
+              </a:extLst>
+            </p:cNvPr>
+            <p:cNvPicPr>
+              <a:picLocks noChangeAspect="1" noChangeArrowheads="1"/>
+            </p:cNvPicPr>
+            <p:nvPr/>
+          </p:nvPicPr>
+          <p:blipFill>
+            <a:blip>
+              <a:extLst>
+                <a:ext uri="{96DAC541-7B7A-43D3-8B79-37D633B846F1}">
+                  <asvg:svgBlip xmlns:asvg="http://schemas.microsoft.com/office/drawing/2016/SVG/main" r:embed="rId8"/>
+                </a:ext>
+              </a:extLst>
+            </a:blip>
+            <a:srcRect/>
+            <a:stretch/>
+          </p:blipFill>
+          <p:spPr bwMode="auto">
+            <a:xfrm>
+              <a:off x="2639676" y="4103327"/>
+              <a:ext cx="457200" cy="457200"/>
+            </a:xfrm>
+            <a:prstGeom prst="rect">
+              <a:avLst/>
+            </a:prstGeom>
+            <a:noFill/>
+            <a:ln>
+              <a:noFill/>
+            </a:ln>
+            <a:extLst>
+              <a:ext uri="{909E8E84-426E-40DD-AFC4-6F175D3DCCD1}">
+                <a14:hiddenFill xmlns:a14="http://schemas.microsoft.com/office/drawing/2010/main">
+                  <a:solidFill>
+                    <a:srgbClr val="FFFFFF"/>
+                  </a:solidFill>
+                </a14:hiddenFill>
+              </a:ext>
+              <a:ext uri="{91240B29-F687-4F45-9708-019B960494DF}">
+                <a14:hiddenLine xmlns:a14="http://schemas.microsoft.com/office/drawing/2010/main" w="9525">
+                  <a:solidFill>
+                    <a:srgbClr val="000000"/>
+                  </a:solidFill>
+                  <a:miter lim="800000"/>
+                  <a:headEnd/>
+                  <a:tailEnd/>
+                </a14:hiddenLine>
+              </a:ext>
+            </a:extLst>
+          </p:spPr>
+        </p:pic>
+        <p:sp>
+          <p:nvSpPr>
+            <p:cNvPr id="5" name="TextBox 16">
+              <a:extLst>
+                <a:ext uri="{FF2B5EF4-FFF2-40B4-BE49-F238E27FC236}">
+                  <a16:creationId xmlns:a16="http://schemas.microsoft.com/office/drawing/2014/main" id="{8D876428-C144-EEF0-D77F-972B29910159}"/>
+                </a:ext>
+              </a:extLst>
+            </p:cNvPr>
+            <p:cNvSpPr txBox="1">
+              <a:spLocks noChangeArrowheads="1"/>
+            </p:cNvSpPr>
+            <p:nvPr/>
+          </p:nvSpPr>
+          <p:spPr bwMode="auto">
+            <a:xfrm>
+              <a:off x="2224375" y="4539996"/>
+              <a:ext cx="1468727" cy="430887"/>
+            </a:xfrm>
+            <a:prstGeom prst="rect">
+              <a:avLst/>
+            </a:prstGeom>
+            <a:noFill/>
+            <a:ln>
+              <a:noFill/>
+            </a:ln>
+            <a:extLst>
+              <a:ext uri="{909E8E84-426E-40DD-AFC4-6F175D3DCCD1}">
+                <a14:hiddenFill xmlns:a14="http://schemas.microsoft.com/office/drawing/2010/main">
+                  <a:solidFill>
+                    <a:srgbClr val="FFFFFF"/>
+                  </a:solidFill>
+                </a14:hiddenFill>
+              </a:ext>
+              <a:ext uri="{91240B29-F687-4F45-9708-019B960494DF}">
+                <a14:hiddenLine xmlns:a14="http://schemas.microsoft.com/office/drawing/2010/main" w="9525">
+                  <a:solidFill>
+                    <a:srgbClr val="000000"/>
+                  </a:solidFill>
+                  <a:miter lim="800000"/>
+                  <a:headEnd/>
+                  <a:tailEnd/>
+                </a14:hiddenLine>
+              </a:ext>
+            </a:extLst>
+          </p:spPr>
+          <p:txBody>
+            <a:bodyPr wrap="square">
+              <a:spAutoFit/>
+            </a:bodyPr>
+            <a:lstStyle>
+              <a:lvl1pPr>
+                <a:defRPr>
+                  <a:solidFill>
+                    <a:schemeClr val="tx1"/>
+                  </a:solidFill>
+                  <a:latin typeface="Calibri" panose="020F0502020204030204" pitchFamily="34" charset="0"/>
+                </a:defRPr>
+              </a:lvl1pPr>
+              <a:lvl2pPr marL="742950" indent="-285750">
+                <a:defRPr>
+                  <a:solidFill>
+                    <a:schemeClr val="tx1"/>
+                  </a:solidFill>
+                  <a:latin typeface="Calibri" panose="020F0502020204030204" pitchFamily="34" charset="0"/>
+                </a:defRPr>
+              </a:lvl2pPr>
+              <a:lvl3pPr marL="1143000" indent="-228600">
+                <a:defRPr>
+                  <a:solidFill>
+                    <a:schemeClr val="tx1"/>
+                  </a:solidFill>
+                  <a:latin typeface="Calibri" panose="020F0502020204030204" pitchFamily="34" charset="0"/>
+                </a:defRPr>
+              </a:lvl3pPr>
+              <a:lvl4pPr marL="1600200" indent="-228600">
+                <a:defRPr>
+                  <a:solidFill>
+                    <a:schemeClr val="tx1"/>
+                  </a:solidFill>
+                  <a:latin typeface="Calibri" panose="020F0502020204030204" pitchFamily="34" charset="0"/>
+                </a:defRPr>
+              </a:lvl4pPr>
+              <a:lvl5pPr marL="2057400" indent="-228600">
+                <a:defRPr>
+                  <a:solidFill>
+                    <a:schemeClr val="tx1"/>
+                  </a:solidFill>
+                  <a:latin typeface="Calibri" panose="020F0502020204030204" pitchFamily="34" charset="0"/>
+                </a:defRPr>
+              </a:lvl5pPr>
+              <a:lvl6pPr marL="2514600" indent="-228600" eaLnBrk="0" fontAlgn="base" hangingPunct="0">
+                <a:spcBef>
+                  <a:spcPct val="0"/>
+                </a:spcBef>
+                <a:spcAft>
+                  <a:spcPct val="0"/>
+                </a:spcAft>
+                <a:defRPr>
+                  <a:solidFill>
+                    <a:schemeClr val="tx1"/>
+                  </a:solidFill>
+                  <a:latin typeface="Calibri" panose="020F0502020204030204" pitchFamily="34" charset="0"/>
+                </a:defRPr>
+              </a:lvl6pPr>
+              <a:lvl7pPr marL="2971800" indent="-228600" eaLnBrk="0" fontAlgn="base" hangingPunct="0">
+                <a:spcBef>
+                  <a:spcPct val="0"/>
+                </a:spcBef>
+                <a:spcAft>
+                  <a:spcPct val="0"/>
+                </a:spcAft>
+                <a:defRPr>
+                  <a:solidFill>
+                    <a:schemeClr val="tx1"/>
+                  </a:solidFill>
+                  <a:latin typeface="Calibri" panose="020F0502020204030204" pitchFamily="34" charset="0"/>
+                </a:defRPr>
+              </a:lvl7pPr>
+              <a:lvl8pPr marL="3429000" indent="-228600" eaLnBrk="0" fontAlgn="base" hangingPunct="0">
+                <a:spcBef>
+                  <a:spcPct val="0"/>
+                </a:spcBef>
+                <a:spcAft>
+                  <a:spcPct val="0"/>
+                </a:spcAft>
+                <a:defRPr>
+                  <a:solidFill>
+                    <a:schemeClr val="tx1"/>
+                  </a:solidFill>
+                  <a:latin typeface="Calibri" panose="020F0502020204030204" pitchFamily="34" charset="0"/>
+                </a:defRPr>
+              </a:lvl8pPr>
+              <a:lvl9pPr marL="3886200" indent="-228600" eaLnBrk="0" fontAlgn="base" hangingPunct="0">
+                <a:spcBef>
+                  <a:spcPct val="0"/>
+                </a:spcBef>
+                <a:spcAft>
+                  <a:spcPct val="0"/>
+                </a:spcAft>
+                <a:defRPr>
+                  <a:solidFill>
+                    <a:schemeClr val="tx1"/>
+                  </a:solidFill>
+                  <a:latin typeface="Calibri" panose="020F0502020204030204" pitchFamily="34" charset="0"/>
+                </a:defRPr>
+              </a:lvl9pPr>
+            </a:lstStyle>
+            <a:p>
+              <a:pPr algn="ctr" eaLnBrk="1" hangingPunct="1"/>
+              <a:r>
+                <a:rPr lang="en-US" altLang="en-US" sz="1100" dirty="0">
+                  <a:latin typeface="Arial" panose="020B0604020202020204" pitchFamily="34" charset="0"/>
+                  <a:ea typeface="Amazon Ember" panose="020B0603020204020204" pitchFamily="34" charset="0"/>
+                  <a:cs typeface="Arial" panose="020B0604020202020204" pitchFamily="34" charset="0"/>
+                </a:rPr>
+                <a:t>EC2 Instance Connect Endpoint</a:t>
+              </a:r>
+            </a:p>
+          </p:txBody>
+        </p:sp>
+        <p:pic>
+          <p:nvPicPr>
+            <p:cNvPr id="6" name="Graphic 31" descr="Elastic network interface resource icon for the Amazon VPC service.&#10;">
+              <a:extLst>
+                <a:ext uri="{FF2B5EF4-FFF2-40B4-BE49-F238E27FC236}">
+                  <a16:creationId xmlns:a16="http://schemas.microsoft.com/office/drawing/2014/main" id="{0E9D5816-5E4C-9C02-1968-4A73F55F1DEC}"/>
+                </a:ext>
+              </a:extLst>
+            </p:cNvPr>
+            <p:cNvPicPr>
+              <a:picLocks noChangeAspect="1"/>
+            </p:cNvPicPr>
+            <p:nvPr/>
+          </p:nvPicPr>
+          <p:blipFill>
+            <a:blip>
+              <a:extLst>
+                <a:ext uri="{96DAC541-7B7A-43D3-8B79-37D633B846F1}">
+                  <asvg:svgBlip xmlns:asvg="http://schemas.microsoft.com/office/drawing/2016/SVG/main" r:embed="rId9"/>
+                </a:ext>
+              </a:extLst>
+            </a:blip>
+            <a:stretch>
+              <a:fillRect/>
+            </a:stretch>
+          </p:blipFill>
+          <p:spPr>
+            <a:xfrm>
+              <a:off x="4321335" y="4092176"/>
+              <a:ext cx="457200" cy="457200"/>
+            </a:xfrm>
+            <a:prstGeom prst="rect">
+              <a:avLst/>
+            </a:prstGeom>
+          </p:spPr>
+        </p:pic>
+        <p:sp>
+          <p:nvSpPr>
+            <p:cNvPr id="7" name="TextBox 18">
+              <a:extLst>
+                <a:ext uri="{FF2B5EF4-FFF2-40B4-BE49-F238E27FC236}">
+                  <a16:creationId xmlns:a16="http://schemas.microsoft.com/office/drawing/2014/main" id="{048344A8-5C99-9C36-7FF1-8516FD82302E}"/>
+                </a:ext>
+              </a:extLst>
+            </p:cNvPr>
+            <p:cNvSpPr txBox="1">
+              <a:spLocks noChangeArrowheads="1"/>
+            </p:cNvSpPr>
+            <p:nvPr/>
+          </p:nvSpPr>
+          <p:spPr bwMode="auto">
+            <a:xfrm>
+              <a:off x="3878509" y="4534028"/>
+              <a:ext cx="1342852" cy="430887"/>
+            </a:xfrm>
+            <a:prstGeom prst="rect">
+              <a:avLst/>
+            </a:prstGeom>
+            <a:noFill/>
+            <a:ln>
+              <a:noFill/>
+            </a:ln>
+            <a:extLst>
+              <a:ext uri="{909E8E84-426E-40DD-AFC4-6F175D3DCCD1}">
+                <a14:hiddenFill xmlns:a14="http://schemas.microsoft.com/office/drawing/2010/main">
+                  <a:solidFill>
+                    <a:srgbClr val="FFFFFF"/>
+                  </a:solidFill>
+                </a14:hiddenFill>
+              </a:ext>
+              <a:ext uri="{91240B29-F687-4F45-9708-019B960494DF}">
+                <a14:hiddenLine xmlns:a14="http://schemas.microsoft.com/office/drawing/2010/main" w="9525">
+                  <a:solidFill>
+                    <a:srgbClr val="000000"/>
+                  </a:solidFill>
+                  <a:miter lim="800000"/>
+                  <a:headEnd/>
+                  <a:tailEnd/>
+                </a14:hiddenLine>
+              </a:ext>
+            </a:extLst>
+          </p:spPr>
+          <p:txBody>
+            <a:bodyPr wrap="square">
+              <a:spAutoFit/>
+            </a:bodyPr>
+            <a:lstStyle>
+              <a:lvl1pPr>
+                <a:defRPr>
+                  <a:solidFill>
+                    <a:schemeClr val="tx1"/>
+                  </a:solidFill>
+                  <a:latin typeface="Calibri" panose="020F0502020204030204" pitchFamily="34" charset="0"/>
+                </a:defRPr>
+              </a:lvl1pPr>
+              <a:lvl2pPr marL="742950" indent="-285750">
+                <a:defRPr>
+                  <a:solidFill>
+                    <a:schemeClr val="tx1"/>
+                  </a:solidFill>
+                  <a:latin typeface="Calibri" panose="020F0502020204030204" pitchFamily="34" charset="0"/>
+                </a:defRPr>
+              </a:lvl2pPr>
+              <a:lvl3pPr marL="1143000" indent="-228600">
+                <a:defRPr>
+                  <a:solidFill>
+                    <a:schemeClr val="tx1"/>
+                  </a:solidFill>
+                  <a:latin typeface="Calibri" panose="020F0502020204030204" pitchFamily="34" charset="0"/>
+                </a:defRPr>
+              </a:lvl3pPr>
+              <a:lvl4pPr marL="1600200" indent="-228600">
+                <a:defRPr>
+                  <a:solidFill>
+                    <a:schemeClr val="tx1"/>
+                  </a:solidFill>
+                  <a:latin typeface="Calibri" panose="020F0502020204030204" pitchFamily="34" charset="0"/>
+                </a:defRPr>
+              </a:lvl4pPr>
+              <a:lvl5pPr marL="2057400" indent="-228600">
+                <a:defRPr>
+                  <a:solidFill>
+                    <a:schemeClr val="tx1"/>
+                  </a:solidFill>
+                  <a:latin typeface="Calibri" panose="020F0502020204030204" pitchFamily="34" charset="0"/>
+                </a:defRPr>
+              </a:lvl5pPr>
+              <a:lvl6pPr marL="2514600" indent="-228600" eaLnBrk="0" fontAlgn="base" hangingPunct="0">
+                <a:spcBef>
+                  <a:spcPct val="0"/>
+                </a:spcBef>
+                <a:spcAft>
+                  <a:spcPct val="0"/>
+                </a:spcAft>
+                <a:defRPr>
+                  <a:solidFill>
+                    <a:schemeClr val="tx1"/>
+                  </a:solidFill>
+                  <a:latin typeface="Calibri" panose="020F0502020204030204" pitchFamily="34" charset="0"/>
+                </a:defRPr>
+              </a:lvl6pPr>
+              <a:lvl7pPr marL="2971800" indent="-228600" eaLnBrk="0" fontAlgn="base" hangingPunct="0">
+                <a:spcBef>
+                  <a:spcPct val="0"/>
+                </a:spcBef>
+                <a:spcAft>
+                  <a:spcPct val="0"/>
+                </a:spcAft>
+                <a:defRPr>
+                  <a:solidFill>
+                    <a:schemeClr val="tx1"/>
+                  </a:solidFill>
+                  <a:latin typeface="Calibri" panose="020F0502020204030204" pitchFamily="34" charset="0"/>
+                </a:defRPr>
+              </a:lvl7pPr>
+              <a:lvl8pPr marL="3429000" indent="-228600" eaLnBrk="0" fontAlgn="base" hangingPunct="0">
+                <a:spcBef>
+                  <a:spcPct val="0"/>
+                </a:spcBef>
+                <a:spcAft>
+                  <a:spcPct val="0"/>
+                </a:spcAft>
+                <a:defRPr>
+                  <a:solidFill>
+                    <a:schemeClr val="tx1"/>
+                  </a:solidFill>
+                  <a:latin typeface="Calibri" panose="020F0502020204030204" pitchFamily="34" charset="0"/>
+                </a:defRPr>
+              </a:lvl8pPr>
+              <a:lvl9pPr marL="3886200" indent="-228600" eaLnBrk="0" fontAlgn="base" hangingPunct="0">
+                <a:spcBef>
+                  <a:spcPct val="0"/>
+                </a:spcBef>
+                <a:spcAft>
+                  <a:spcPct val="0"/>
+                </a:spcAft>
+                <a:defRPr>
+                  <a:solidFill>
+                    <a:schemeClr val="tx1"/>
+                  </a:solidFill>
+                  <a:latin typeface="Calibri" panose="020F0502020204030204" pitchFamily="34" charset="0"/>
+                </a:defRPr>
+              </a:lvl9pPr>
+            </a:lstStyle>
+            <a:p>
+              <a:pPr algn="ctr" eaLnBrk="1" hangingPunct="1"/>
+              <a:r>
+                <a:rPr lang="en-US" altLang="en-US" sz="1100" dirty="0">
+                  <a:latin typeface="Arial" panose="020B0604020202020204" pitchFamily="34" charset="0"/>
+                  <a:ea typeface="Amazon Ember" panose="020B0603020204020204" pitchFamily="34" charset="0"/>
+                  <a:cs typeface="Arial" panose="020B0604020202020204" pitchFamily="34" charset="0"/>
+                </a:rPr>
+                <a:t>Elastic network interface</a:t>
+              </a:r>
+            </a:p>
+          </p:txBody>
+        </p:sp>
+        <p:cxnSp>
+          <p:nvCxnSpPr>
+            <p:cNvPr id="12" name="直線矢印コネクタ 11">
+              <a:extLst>
+                <a:ext uri="{FF2B5EF4-FFF2-40B4-BE49-F238E27FC236}">
+                  <a16:creationId xmlns:a16="http://schemas.microsoft.com/office/drawing/2014/main" id="{B8E0C7D4-5407-E31D-D715-EB067CE56438}"/>
+                </a:ext>
+              </a:extLst>
+            </p:cNvPr>
+            <p:cNvCxnSpPr>
+              <a:cxnSpLocks/>
+            </p:cNvCxnSpPr>
+            <p:nvPr/>
+          </p:nvCxnSpPr>
+          <p:spPr>
+            <a:xfrm>
+              <a:off x="3085943" y="4307144"/>
+              <a:ext cx="1190017" cy="8549"/>
+            </a:xfrm>
+            <a:prstGeom prst="straightConnector1">
+              <a:avLst/>
+            </a:prstGeom>
+            <a:ln w="19050" cap="rnd">
+              <a:solidFill>
+                <a:schemeClr val="tx1"/>
+              </a:solidFill>
+              <a:tailEnd type="triangle"/>
+            </a:ln>
+          </p:spPr>
+          <p:style>
+            <a:lnRef idx="1">
+              <a:schemeClr val="accent1"/>
+            </a:lnRef>
+            <a:fillRef idx="0">
+              <a:schemeClr val="accent1"/>
+            </a:fillRef>
+            <a:effectRef idx="0">
+              <a:schemeClr val="accent1"/>
+            </a:effectRef>
+            <a:fontRef idx="minor">
+              <a:schemeClr val="tx1"/>
+            </a:fontRef>
+          </p:style>
+        </p:cxnSp>
+        <p:cxnSp>
+          <p:nvCxnSpPr>
+            <p:cNvPr id="13" name="直線矢印コネクタ 12">
+              <a:extLst>
+                <a:ext uri="{FF2B5EF4-FFF2-40B4-BE49-F238E27FC236}">
+                  <a16:creationId xmlns:a16="http://schemas.microsoft.com/office/drawing/2014/main" id="{FB8AD1DC-A54B-34A6-AC9F-4B78F8090165}"/>
+                </a:ext>
+              </a:extLst>
+            </p:cNvPr>
+            <p:cNvCxnSpPr>
+              <a:cxnSpLocks/>
+              <a:stCxn id="6" idx="3"/>
+            </p:cNvCxnSpPr>
+            <p:nvPr/>
+          </p:nvCxnSpPr>
+          <p:spPr>
+            <a:xfrm flipV="1">
+              <a:off x="4778535" y="4315693"/>
+              <a:ext cx="293568" cy="5083"/>
+            </a:xfrm>
+            <a:prstGeom prst="straightConnector1">
+              <a:avLst/>
+            </a:prstGeom>
+            <a:ln w="19050" cap="rnd">
+              <a:solidFill>
+                <a:schemeClr val="tx1"/>
+              </a:solidFill>
+              <a:tailEnd type="triangle"/>
+            </a:ln>
+          </p:spPr>
+          <p:style>
+            <a:lnRef idx="1">
+              <a:schemeClr val="accent1"/>
+            </a:lnRef>
+            <a:fillRef idx="0">
+              <a:schemeClr val="accent1"/>
+            </a:fillRef>
+            <a:effectRef idx="0">
+              <a:schemeClr val="accent1"/>
+            </a:effectRef>
+            <a:fontRef idx="minor">
+              <a:schemeClr val="tx1"/>
+            </a:fontRef>
+          </p:style>
+        </p:cxnSp>
+        <p:sp>
+          <p:nvSpPr>
+            <p:cNvPr id="10" name="TextBox 21">
+              <a:extLst>
+                <a:ext uri="{FF2B5EF4-FFF2-40B4-BE49-F238E27FC236}">
+                  <a16:creationId xmlns:a16="http://schemas.microsoft.com/office/drawing/2014/main" id="{EB29CED0-644D-ECAB-939A-97F5C02531F1}"/>
+                </a:ext>
+              </a:extLst>
+            </p:cNvPr>
+            <p:cNvSpPr txBox="1">
+              <a:spLocks noChangeArrowheads="1"/>
+            </p:cNvSpPr>
+            <p:nvPr/>
+          </p:nvSpPr>
+          <p:spPr bwMode="auto">
+            <a:xfrm>
+              <a:off x="8170399" y="3469663"/>
+              <a:ext cx="1081872" cy="261610"/>
+            </a:xfrm>
+            <a:prstGeom prst="rect">
+              <a:avLst/>
+            </a:prstGeom>
+            <a:noFill/>
+            <a:ln>
+              <a:noFill/>
+            </a:ln>
+            <a:extLst>
+              <a:ext uri="{909E8E84-426E-40DD-AFC4-6F175D3DCCD1}">
+                <a14:hiddenFill xmlns:a14="http://schemas.microsoft.com/office/drawing/2010/main">
+                  <a:solidFill>
+                    <a:srgbClr val="FFFFFF"/>
+                  </a:solidFill>
+                </a14:hiddenFill>
+              </a:ext>
+              <a:ext uri="{91240B29-F687-4F45-9708-019B960494DF}">
+                <a14:hiddenLine xmlns:a14="http://schemas.microsoft.com/office/drawing/2010/main" w="9525">
+                  <a:solidFill>
+                    <a:srgbClr val="000000"/>
+                  </a:solidFill>
+                  <a:miter lim="800000"/>
+                  <a:headEnd/>
+                  <a:tailEnd/>
+                </a14:hiddenLine>
+              </a:ext>
+            </a:extLst>
+          </p:spPr>
+          <p:txBody>
+            <a:bodyPr wrap="square">
+              <a:spAutoFit/>
+            </a:bodyPr>
+            <a:lstStyle>
+              <a:lvl1pPr>
+                <a:defRPr>
+                  <a:solidFill>
+                    <a:schemeClr val="tx1"/>
+                  </a:solidFill>
+                  <a:latin typeface="Calibri" panose="020F0502020204030204" pitchFamily="34" charset="0"/>
+                </a:defRPr>
+              </a:lvl1pPr>
+              <a:lvl2pPr marL="742950" indent="-285750">
+                <a:defRPr>
+                  <a:solidFill>
+                    <a:schemeClr val="tx1"/>
+                  </a:solidFill>
+                  <a:latin typeface="Calibri" panose="020F0502020204030204" pitchFamily="34" charset="0"/>
+                </a:defRPr>
+              </a:lvl2pPr>
+              <a:lvl3pPr marL="1143000" indent="-228600">
+                <a:defRPr>
+                  <a:solidFill>
+                    <a:schemeClr val="tx1"/>
+                  </a:solidFill>
+                  <a:latin typeface="Calibri" panose="020F0502020204030204" pitchFamily="34" charset="0"/>
+                </a:defRPr>
+              </a:lvl3pPr>
+              <a:lvl4pPr marL="1600200" indent="-228600">
+                <a:defRPr>
+                  <a:solidFill>
+                    <a:schemeClr val="tx1"/>
+                  </a:solidFill>
+                  <a:latin typeface="Calibri" panose="020F0502020204030204" pitchFamily="34" charset="0"/>
+                </a:defRPr>
+              </a:lvl4pPr>
+              <a:lvl5pPr marL="2057400" indent="-228600">
+                <a:defRPr>
+                  <a:solidFill>
+                    <a:schemeClr val="tx1"/>
+                  </a:solidFill>
+                  <a:latin typeface="Calibri" panose="020F0502020204030204" pitchFamily="34" charset="0"/>
+                </a:defRPr>
+              </a:lvl5pPr>
+              <a:lvl6pPr marL="2514600" indent="-228600" eaLnBrk="0" fontAlgn="base" hangingPunct="0">
+                <a:spcBef>
+                  <a:spcPct val="0"/>
+                </a:spcBef>
+                <a:spcAft>
+                  <a:spcPct val="0"/>
+                </a:spcAft>
+                <a:defRPr>
+                  <a:solidFill>
+                    <a:schemeClr val="tx1"/>
+                  </a:solidFill>
+                  <a:latin typeface="Calibri" panose="020F0502020204030204" pitchFamily="34" charset="0"/>
+                </a:defRPr>
+              </a:lvl6pPr>
+              <a:lvl7pPr marL="2971800" indent="-228600" eaLnBrk="0" fontAlgn="base" hangingPunct="0">
+                <a:spcBef>
+                  <a:spcPct val="0"/>
+                </a:spcBef>
+                <a:spcAft>
+                  <a:spcPct val="0"/>
+                </a:spcAft>
+                <a:defRPr>
+                  <a:solidFill>
+                    <a:schemeClr val="tx1"/>
+                  </a:solidFill>
+                  <a:latin typeface="Calibri" panose="020F0502020204030204" pitchFamily="34" charset="0"/>
+                </a:defRPr>
+              </a:lvl7pPr>
+              <a:lvl8pPr marL="3429000" indent="-228600" eaLnBrk="0" fontAlgn="base" hangingPunct="0">
+                <a:spcBef>
+                  <a:spcPct val="0"/>
+                </a:spcBef>
+                <a:spcAft>
+                  <a:spcPct val="0"/>
+                </a:spcAft>
+                <a:defRPr>
+                  <a:solidFill>
+                    <a:schemeClr val="tx1"/>
+                  </a:solidFill>
+                  <a:latin typeface="Calibri" panose="020F0502020204030204" pitchFamily="34" charset="0"/>
+                </a:defRPr>
+              </a:lvl8pPr>
+              <a:lvl9pPr marL="3886200" indent="-228600" eaLnBrk="0" fontAlgn="base" hangingPunct="0">
+                <a:spcBef>
+                  <a:spcPct val="0"/>
+                </a:spcBef>
+                <a:spcAft>
+                  <a:spcPct val="0"/>
+                </a:spcAft>
+                <a:defRPr>
+                  <a:solidFill>
+                    <a:schemeClr val="tx1"/>
+                  </a:solidFill>
+                  <a:latin typeface="Calibri" panose="020F0502020204030204" pitchFamily="34" charset="0"/>
+                </a:defRPr>
+              </a:lvl9pPr>
+            </a:lstStyle>
+            <a:p>
+              <a:pPr algn="ctr" eaLnBrk="1" hangingPunct="1">
+                <a:spcBef>
+                  <a:spcPts val="600"/>
+                </a:spcBef>
+              </a:pPr>
+              <a:r>
+                <a:rPr lang="en-US" altLang="en-US" sz="1050" dirty="0">
+                  <a:latin typeface="Meiryo" panose="020B0604030504040204" pitchFamily="34" charset="-128"/>
+                  <a:ea typeface="Meiryo" panose="020B0604030504040204" pitchFamily="34" charset="-128"/>
+                  <a:cs typeface="Arial" panose="020B0604020202020204" pitchFamily="34" charset="0"/>
+                </a:rPr>
+                <a:t>DMS SC</a:t>
+              </a:r>
+            </a:p>
+          </p:txBody>
+        </p:sp>
+        <p:pic>
+          <p:nvPicPr>
+            <p:cNvPr id="11" name="Graphic 18" descr="AWS Database Migration Service (AWS DMS) service icon.">
+              <a:extLst>
+                <a:ext uri="{FF2B5EF4-FFF2-40B4-BE49-F238E27FC236}">
+                  <a16:creationId xmlns:a16="http://schemas.microsoft.com/office/drawing/2014/main" id="{69A71E23-4421-B1C7-A239-E56A87F5D53B}"/>
+                </a:ext>
+              </a:extLst>
+            </p:cNvPr>
+            <p:cNvPicPr>
+              <a:picLocks noChangeAspect="1" noChangeArrowheads="1"/>
+            </p:cNvPicPr>
+            <p:nvPr/>
+          </p:nvPicPr>
+          <p:blipFill>
+            <a:blip>
+              <a:extLst>
+                <a:ext uri="{96DAC541-7B7A-43D3-8B79-37D633B846F1}">
+                  <asvg:svgBlip xmlns:asvg="http://schemas.microsoft.com/office/drawing/2016/SVG/main" r:embed="rId10"/>
+                </a:ext>
+              </a:extLst>
+            </a:blip>
+            <a:srcRect/>
+            <a:stretch/>
+          </p:blipFill>
+          <p:spPr bwMode="auto">
+            <a:xfrm>
+              <a:off x="8483039" y="2991670"/>
+              <a:ext cx="458713" cy="458713"/>
+            </a:xfrm>
+            <a:prstGeom prst="rect">
+              <a:avLst/>
+            </a:prstGeom>
+            <a:noFill/>
+            <a:ln>
+              <a:noFill/>
+            </a:ln>
+            <a:extLst>
+              <a:ext uri="{909E8E84-426E-40DD-AFC4-6F175D3DCCD1}">
+                <a14:hiddenFill xmlns:a14="http://schemas.microsoft.com/office/drawing/2010/main">
+                  <a:solidFill>
+                    <a:srgbClr val="FFFFFF"/>
+                  </a:solidFill>
+                </a14:hiddenFill>
+              </a:ext>
+              <a:ext uri="{91240B29-F687-4F45-9708-019B960494DF}">
+                <a14:hiddenLine xmlns:a14="http://schemas.microsoft.com/office/drawing/2010/main" w="9525">
+                  <a:solidFill>
+                    <a:srgbClr val="000000"/>
+                  </a:solidFill>
+                  <a:miter lim="800000"/>
+                  <a:headEnd/>
+                  <a:tailEnd/>
+                </a14:hiddenLine>
+              </a:ext>
+            </a:extLst>
+          </p:spPr>
+        </p:pic>
+        <p:sp>
+          <p:nvSpPr>
+            <p:cNvPr id="8" name="Rectangle 59">
+              <a:extLst>
+                <a:ext uri="{FF2B5EF4-FFF2-40B4-BE49-F238E27FC236}">
+                  <a16:creationId xmlns:a16="http://schemas.microsoft.com/office/drawing/2014/main" id="{125F599A-2E24-02E5-96EC-606EEA86A1C9}"/>
+                </a:ext>
+              </a:extLst>
+            </p:cNvPr>
+            <p:cNvSpPr/>
+            <p:nvPr/>
+          </p:nvSpPr>
+          <p:spPr>
+            <a:xfrm>
+              <a:off x="1144136" y="4152726"/>
+              <a:ext cx="518071" cy="381302"/>
+            </a:xfrm>
+            <a:prstGeom prst="rect">
+              <a:avLst/>
+            </a:prstGeom>
+            <a:noFill/>
+            <a:ln w="15875">
+              <a:solidFill>
+                <a:srgbClr val="ED7100"/>
+              </a:solidFill>
+            </a:ln>
+          </p:spPr>
+          <p:style>
+            <a:lnRef idx="2">
+              <a:schemeClr val="accent1">
+                <a:shade val="50000"/>
+              </a:schemeClr>
+            </a:lnRef>
+            <a:fillRef idx="1">
+              <a:schemeClr val="accent1"/>
+            </a:fillRef>
+            <a:effectRef idx="0">
+              <a:schemeClr val="accent1"/>
+            </a:effectRef>
+            <a:fontRef idx="minor">
+              <a:schemeClr val="lt1"/>
+            </a:fontRef>
+          </p:style>
+          <p:txBody>
+            <a:bodyPr wrap="none" lIns="502920" tIns="91440"/>
+            <a:lstStyle/>
+            <a:p>
+              <a:pPr>
+                <a:defRPr/>
+              </a:pPr>
+              <a:endParaRPr lang="en-US" altLang="ja-JP" sz="1050" dirty="0">
                 <a:ln w="0"/>
                 <a:solidFill>
                   <a:schemeClr val="tx1"/>
                 </a:solidFill>
                 <a:latin typeface="Arial" panose="020B0604020202020204" pitchFamily="34" charset="0"/>
                 <a:cs typeface="Arial" panose="020B0604020202020204" pitchFamily="34" charset="0"/>
-              </a:rPr>
-              <a:t> VPC</a:t>
-            </a:r>
-          </a:p>
-        </p:txBody>
-      </p:sp>
-      <p:pic>
-        <p:nvPicPr>
-          <p:cNvPr id="34" name="Graphic 40" descr="VPC group icon. ">
-            <a:extLst>
-              <a:ext uri="{FF2B5EF4-FFF2-40B4-BE49-F238E27FC236}">
-                <a16:creationId xmlns:a16="http://schemas.microsoft.com/office/drawing/2014/main" id="{B98F45AB-FE28-918B-0127-5A35672D635F}"/>
-              </a:ext>
-            </a:extLst>
-          </p:cNvPr>
-          <p:cNvPicPr>
-            <a:picLocks noChangeAspect="1"/>
-          </p:cNvPicPr>
-          <p:nvPr/>
-        </p:nvPicPr>
-        <p:blipFill>
-          <a:blip r:embed="rId7">
-            <a:extLst>
-              <a:ext uri="{96DAC541-7B7A-43D3-8B79-37D633B846F1}">
-                <asvg:svgBlip xmlns:asvg="http://schemas.microsoft.com/office/drawing/2016/SVG/main" r:embed="rId8"/>
-              </a:ext>
-            </a:extLst>
-          </a:blip>
-          <a:srcRect/>
-          <a:stretch/>
-        </p:blipFill>
-        <p:spPr>
-          <a:xfrm>
-            <a:off x="3641764" y="2275231"/>
-            <a:ext cx="381000" cy="381000"/>
-          </a:xfrm>
-          <a:prstGeom prst="rect">
-            <a:avLst/>
-          </a:prstGeom>
-        </p:spPr>
-      </p:pic>
-      <p:sp>
-        <p:nvSpPr>
-          <p:cNvPr id="38" name="Rectangle 31" descr="Region group">
-            <a:extLst>
-              <a:ext uri="{FF2B5EF4-FFF2-40B4-BE49-F238E27FC236}">
-                <a16:creationId xmlns:a16="http://schemas.microsoft.com/office/drawing/2014/main" id="{D3740791-7DE4-3500-0105-532C60BE2789}"/>
-              </a:ext>
-            </a:extLst>
-          </p:cNvPr>
-          <p:cNvSpPr/>
-          <p:nvPr/>
-        </p:nvSpPr>
-        <p:spPr>
-          <a:xfrm>
-            <a:off x="2161573" y="1811778"/>
-            <a:ext cx="8240190" cy="3960000"/>
-          </a:xfrm>
-          <a:prstGeom prst="rect">
-            <a:avLst/>
-          </a:prstGeom>
-          <a:noFill/>
-          <a:ln w="15875">
-            <a:solidFill>
-              <a:srgbClr val="00A4A6"/>
-            </a:solidFill>
-            <a:prstDash val="sysDash"/>
-          </a:ln>
-        </p:spPr>
-        <p:style>
-          <a:lnRef idx="2">
-            <a:schemeClr val="accent1">
-              <a:shade val="50000"/>
-            </a:schemeClr>
-          </a:lnRef>
-          <a:fillRef idx="1">
-            <a:schemeClr val="accent1"/>
-          </a:fillRef>
-          <a:effectRef idx="0">
-            <a:schemeClr val="accent1"/>
-          </a:effectRef>
-          <a:fontRef idx="minor">
-            <a:schemeClr val="lt1"/>
-          </a:fontRef>
-        </p:style>
-        <p:txBody>
-          <a:bodyPr lIns="502920" tIns="91440"/>
-          <a:lstStyle/>
-          <a:p>
-            <a:pPr eaLnBrk="1" fontAlgn="auto" hangingPunct="1">
-              <a:spcBef>
-                <a:spcPts val="0"/>
-              </a:spcBef>
-              <a:spcAft>
-                <a:spcPts val="0"/>
-              </a:spcAft>
-              <a:defRPr/>
-            </a:pPr>
-            <a:r>
-              <a:rPr lang="en-US" sz="1050" dirty="0">
-                <a:solidFill>
-                  <a:schemeClr val="tx1"/>
-                </a:solidFill>
-                <a:latin typeface="Arial" panose="020B0604020202020204" pitchFamily="34" charset="0"/>
-                <a:cs typeface="Arial" panose="020B0604020202020204" pitchFamily="34" charset="0"/>
-              </a:rPr>
-              <a:t>Region (us-east-1)</a:t>
-            </a:r>
-          </a:p>
-        </p:txBody>
-      </p:sp>
-      <p:pic>
-        <p:nvPicPr>
-          <p:cNvPr id="40" name="Graphic 32" descr="Region group icon.">
-            <a:extLst>
-              <a:ext uri="{FF2B5EF4-FFF2-40B4-BE49-F238E27FC236}">
-                <a16:creationId xmlns:a16="http://schemas.microsoft.com/office/drawing/2014/main" id="{5E2464D6-3C85-D2DF-BCA3-3DD74A26B44C}"/>
-              </a:ext>
-            </a:extLst>
-          </p:cNvPr>
-          <p:cNvPicPr>
-            <a:picLocks noChangeAspect="1"/>
-          </p:cNvPicPr>
-          <p:nvPr/>
-        </p:nvPicPr>
-        <p:blipFill>
-          <a:blip r:embed="rId9">
-            <a:extLst>
-              <a:ext uri="{96DAC541-7B7A-43D3-8B79-37D633B846F1}">
-                <asvg:svgBlip xmlns:asvg="http://schemas.microsoft.com/office/drawing/2016/SVG/main" r:embed="rId10"/>
-              </a:ext>
-            </a:extLst>
-          </a:blip>
-          <a:srcRect/>
-          <a:stretch/>
-        </p:blipFill>
-        <p:spPr>
-          <a:xfrm>
-            <a:off x="2161573" y="1811778"/>
-            <a:ext cx="381000" cy="381000"/>
-          </a:xfrm>
-          <a:prstGeom prst="rect">
-            <a:avLst/>
-          </a:prstGeom>
-        </p:spPr>
-      </p:pic>
-      <p:sp>
-        <p:nvSpPr>
-          <p:cNvPr id="51" name="Rectangle 42">
-            <a:extLst>
-              <a:ext uri="{FF2B5EF4-FFF2-40B4-BE49-F238E27FC236}">
-                <a16:creationId xmlns:a16="http://schemas.microsoft.com/office/drawing/2014/main" id="{D98E2709-5B72-3A20-65AB-0D5ED9699975}"/>
-              </a:ext>
-            </a:extLst>
-          </p:cNvPr>
-          <p:cNvSpPr/>
-          <p:nvPr/>
-        </p:nvSpPr>
-        <p:spPr>
-          <a:xfrm>
-            <a:off x="4022764" y="2752816"/>
-            <a:ext cx="5368001" cy="2520000"/>
-          </a:xfrm>
-          <a:prstGeom prst="rect">
-            <a:avLst/>
-          </a:prstGeom>
-          <a:noFill/>
-          <a:ln w="15875">
-            <a:solidFill>
-              <a:srgbClr val="00A4A6"/>
-            </a:solidFill>
-            <a:prstDash val="solid"/>
-          </a:ln>
-        </p:spPr>
-        <p:style>
-          <a:lnRef idx="2">
-            <a:schemeClr val="accent1">
-              <a:shade val="50000"/>
-            </a:schemeClr>
-          </a:lnRef>
-          <a:fillRef idx="1">
-            <a:schemeClr val="accent1"/>
-          </a:fillRef>
-          <a:effectRef idx="0">
-            <a:schemeClr val="accent1"/>
-          </a:effectRef>
-          <a:fontRef idx="minor">
-            <a:schemeClr val="lt1"/>
-          </a:fontRef>
-        </p:style>
-        <p:txBody>
-          <a:bodyPr wrap="none" lIns="502920" tIns="91440" bIns="45720"/>
-          <a:lstStyle/>
-          <a:p>
-            <a:pPr eaLnBrk="1" fontAlgn="auto" hangingPunct="1">
-              <a:spcBef>
-                <a:spcPts val="0"/>
-              </a:spcBef>
-              <a:spcAft>
-                <a:spcPts val="0"/>
-              </a:spcAft>
-              <a:defRPr/>
-            </a:pPr>
-            <a:r>
-              <a:rPr lang="en-US" sz="1050" dirty="0">
-                <a:solidFill>
-                  <a:schemeClr val="tx1"/>
-                </a:solidFill>
-                <a:latin typeface="Arial" panose="020B0604020202020204" pitchFamily="34" charset="0"/>
-                <a:cs typeface="Arial" panose="020B0604020202020204" pitchFamily="34" charset="0"/>
-              </a:rPr>
-              <a:t>Private subnet</a:t>
-            </a:r>
-          </a:p>
-        </p:txBody>
-      </p:sp>
-      <p:pic>
-        <p:nvPicPr>
-          <p:cNvPr id="52" name="Graphic 43" descr="Private subnet group icon. ">
-            <a:extLst>
-              <a:ext uri="{FF2B5EF4-FFF2-40B4-BE49-F238E27FC236}">
-                <a16:creationId xmlns:a16="http://schemas.microsoft.com/office/drawing/2014/main" id="{0FDDF2C1-24E6-2F63-6F96-72A8059E10AA}"/>
-              </a:ext>
-            </a:extLst>
-          </p:cNvPr>
-          <p:cNvPicPr>
-            <a:picLocks noChangeAspect="1"/>
-          </p:cNvPicPr>
-          <p:nvPr/>
-        </p:nvPicPr>
-        <p:blipFill>
-          <a:blip r:embed="rId11">
-            <a:extLst>
-              <a:ext uri="{96DAC541-7B7A-43D3-8B79-37D633B846F1}">
-                <asvg:svgBlip xmlns:asvg="http://schemas.microsoft.com/office/drawing/2016/SVG/main" r:embed="rId12"/>
-              </a:ext>
-            </a:extLst>
-          </a:blip>
-          <a:srcRect/>
-          <a:stretch/>
-        </p:blipFill>
-        <p:spPr>
-          <a:xfrm>
-            <a:off x="4114800" y="2752815"/>
-            <a:ext cx="381000" cy="381000"/>
-          </a:xfrm>
-          <a:prstGeom prst="rect">
-            <a:avLst/>
-          </a:prstGeom>
-        </p:spPr>
-      </p:pic>
-      <p:sp>
-        <p:nvSpPr>
-          <p:cNvPr id="59" name="Rectangle 59">
-            <a:extLst>
-              <a:ext uri="{FF2B5EF4-FFF2-40B4-BE49-F238E27FC236}">
-                <a16:creationId xmlns:a16="http://schemas.microsoft.com/office/drawing/2014/main" id="{0C71B32B-E04C-1835-CA77-EB4A9A98C908}"/>
-              </a:ext>
-            </a:extLst>
-          </p:cNvPr>
-          <p:cNvSpPr/>
-          <p:nvPr/>
-        </p:nvSpPr>
-        <p:spPr>
-          <a:xfrm>
-            <a:off x="5072103" y="3244476"/>
-            <a:ext cx="2880000" cy="1800000"/>
-          </a:xfrm>
-          <a:prstGeom prst="rect">
-            <a:avLst/>
-          </a:prstGeom>
-          <a:noFill/>
-          <a:ln w="15875">
-            <a:solidFill>
-              <a:srgbClr val="ED7100"/>
-            </a:solidFill>
-          </a:ln>
-        </p:spPr>
-        <p:style>
-          <a:lnRef idx="2">
-            <a:schemeClr val="accent1">
-              <a:shade val="50000"/>
-            </a:schemeClr>
-          </a:lnRef>
-          <a:fillRef idx="1">
-            <a:schemeClr val="accent1"/>
-          </a:fillRef>
-          <a:effectRef idx="0">
-            <a:schemeClr val="accent1"/>
-          </a:effectRef>
-          <a:fontRef idx="minor">
-            <a:schemeClr val="lt1"/>
-          </a:fontRef>
-        </p:style>
-        <p:txBody>
-          <a:bodyPr wrap="none" lIns="502920" tIns="91440"/>
-          <a:lstStyle/>
-          <a:p>
-            <a:pPr>
-              <a:defRPr/>
-            </a:pPr>
-            <a:r>
-              <a:rPr lang="en-US" altLang="ja-JP" sz="1050" dirty="0">
+              </a:endParaRPr>
+            </a:p>
+          </p:txBody>
+        </p:sp>
+        <p:sp>
+          <p:nvSpPr>
+            <p:cNvPr id="16" name="テキスト ボックス 15">
+              <a:extLst>
+                <a:ext uri="{FF2B5EF4-FFF2-40B4-BE49-F238E27FC236}">
+                  <a16:creationId xmlns:a16="http://schemas.microsoft.com/office/drawing/2014/main" id="{88171C51-380F-2AAA-E259-701514B5E16B}"/>
+                </a:ext>
+              </a:extLst>
+            </p:cNvPr>
+            <p:cNvSpPr txBox="1"/>
+            <p:nvPr/>
+          </p:nvSpPr>
+          <p:spPr>
+            <a:xfrm>
+              <a:off x="829311" y="4688391"/>
+              <a:ext cx="1135725" cy="367646"/>
+            </a:xfrm>
+            <a:prstGeom prst="rect">
+              <a:avLst/>
+            </a:prstGeom>
+            <a:noFill/>
+          </p:spPr>
+          <p:txBody>
+            <a:bodyPr wrap="none" lIns="0" rIns="0" rtlCol="0">
+              <a:spAutoFit/>
+            </a:bodyPr>
+            <a:lstStyle/>
+            <a:p>
+              <a:pPr marL="0" marR="0" lvl="0" indent="0" algn="ctr" defTabSz="914400" rtl="0" eaLnBrk="1" fontAlgn="auto" latinLnBrk="0" hangingPunct="1">
+                <a:lnSpc>
+                  <a:spcPct val="100000"/>
+                </a:lnSpc>
+                <a:spcBef>
+                  <a:spcPts val="0"/>
+                </a:spcBef>
+                <a:spcAft>
+                  <a:spcPts val="0"/>
+                </a:spcAft>
+                <a:buClrTx/>
+                <a:buSzTx/>
+                <a:buFontTx/>
+                <a:buNone/>
+                <a:tabLst/>
+                <a:defRPr/>
+              </a:pPr>
+              <a:r>
+                <a:rPr kumimoji="0" lang="ja-JP" altLang="en-US" sz="1050" b="0" i="0" u="none" strike="noStrike" kern="1200" cap="none" spc="0" normalizeH="0" baseline="0" noProof="0">
+                  <a:ln w="0"/>
+                  <a:solidFill>
+                    <a:srgbClr val="FFFFFF"/>
+                  </a:solidFill>
+                  <a:effectLst/>
+                  <a:uLnTx/>
+                  <a:uFillTx/>
+                  <a:latin typeface="Arial" panose="020B0604020202020204" pitchFamily="34" charset="0"/>
+                  <a:ea typeface="メイリオ"/>
+                  <a:cs typeface="Arial" panose="020B0604020202020204" pitchFamily="34" charset="0"/>
+                </a:rPr>
+                <a:t>実行環境</a:t>
+              </a:r>
+              <a:endParaRPr kumimoji="0" lang="en-US" altLang="ja-JP" sz="1050" b="0" i="0" u="none" strike="noStrike" kern="1200" cap="none" spc="0" normalizeH="0" baseline="0" noProof="0" dirty="0">
                 <a:ln w="0"/>
                 <a:solidFill>
-                  <a:schemeClr val="tx1"/>
+                  <a:srgbClr val="FFFFFF"/>
                 </a:solidFill>
+                <a:effectLst/>
+                <a:uLnTx/>
+                <a:uFillTx/>
                 <a:latin typeface="Arial" panose="020B0604020202020204" pitchFamily="34" charset="0"/>
+                <a:ea typeface="メイリオ"/>
                 <a:cs typeface="Arial" panose="020B0604020202020204" pitchFamily="34" charset="0"/>
-              </a:rPr>
-              <a:t>EC2</a:t>
-            </a:r>
-          </a:p>
-          <a:p>
-            <a:pPr>
-              <a:defRPr/>
-            </a:pPr>
-            <a:r>
-              <a:rPr lang="en-US" altLang="ja-JP" sz="1050" dirty="0">
+              </a:endParaRPr>
+            </a:p>
+            <a:p>
+              <a:pPr marL="0" marR="0" lvl="0" indent="0" algn="ctr" defTabSz="914400" rtl="0" eaLnBrk="1" fontAlgn="auto" latinLnBrk="0" hangingPunct="1">
+                <a:lnSpc>
+                  <a:spcPct val="100000"/>
+                </a:lnSpc>
+                <a:spcBef>
+                  <a:spcPts val="0"/>
+                </a:spcBef>
+                <a:spcAft>
+                  <a:spcPts val="0"/>
+                </a:spcAft>
+                <a:buClrTx/>
+                <a:buSzTx/>
+                <a:buFontTx/>
+                <a:buNone/>
+                <a:tabLst/>
+                <a:defRPr/>
+              </a:pPr>
+              <a:r>
+                <a:rPr lang="ja-JP" altLang="en-US" sz="1050">
+                  <a:ln w="0"/>
+                  <a:solidFill>
+                    <a:srgbClr val="FFFFFF"/>
+                  </a:solidFill>
+                  <a:latin typeface="Arial" panose="020B0604020202020204" pitchFamily="34" charset="0"/>
+                  <a:ea typeface="メイリオ"/>
+                  <a:cs typeface="Arial" panose="020B0604020202020204" pitchFamily="34" charset="0"/>
+                </a:rPr>
+                <a:t>（</a:t>
+              </a:r>
+              <a:r>
+                <a:rPr lang="en-US" altLang="ja-JP" sz="1050" dirty="0">
+                  <a:ln w="0"/>
+                  <a:solidFill>
+                    <a:srgbClr val="FFFFFF"/>
+                  </a:solidFill>
+                  <a:latin typeface="Arial" panose="020B0604020202020204" pitchFamily="34" charset="0"/>
+                  <a:ea typeface="メイリオ"/>
+                  <a:cs typeface="Arial" panose="020B0604020202020204" pitchFamily="34" charset="0"/>
+                </a:rPr>
+                <a:t>deploy.sh </a:t>
+              </a:r>
+              <a:r>
+                <a:rPr lang="ja-JP" altLang="en-US" sz="1050">
+                  <a:ln w="0"/>
+                  <a:solidFill>
+                    <a:srgbClr val="FFFFFF"/>
+                  </a:solidFill>
+                  <a:latin typeface="Arial" panose="020B0604020202020204" pitchFamily="34" charset="0"/>
+                  <a:ea typeface="メイリオ"/>
+                  <a:cs typeface="Arial" panose="020B0604020202020204" pitchFamily="34" charset="0"/>
+                </a:rPr>
+                <a:t>を実行）</a:t>
+              </a:r>
+              <a:endParaRPr kumimoji="0" lang="en-US" altLang="ja-JP" sz="1050" b="0" i="0" u="none" strike="noStrike" kern="1200" cap="none" spc="0" normalizeH="0" baseline="0" noProof="0" dirty="0">
                 <a:ln w="0"/>
                 <a:solidFill>
-                  <a:schemeClr val="tx1"/>
+                  <a:srgbClr val="FFFFFF"/>
                 </a:solidFill>
+                <a:effectLst/>
+                <a:uLnTx/>
+                <a:uFillTx/>
                 <a:latin typeface="Arial" panose="020B0604020202020204" pitchFamily="34" charset="0"/>
+                <a:ea typeface="メイリオ"/>
                 <a:cs typeface="Arial" panose="020B0604020202020204" pitchFamily="34" charset="0"/>
-              </a:rPr>
-              <a:t>SQL Converter Agent </a:t>
-            </a:r>
-            <a:r>
-              <a:rPr lang="ja-JP" altLang="en-US" sz="1050">
-                <a:ln w="0"/>
-                <a:solidFill>
-                  <a:schemeClr val="tx1"/>
-                </a:solidFill>
-                <a:latin typeface="Arial" panose="020B0604020202020204" pitchFamily="34" charset="0"/>
-                <a:cs typeface="Arial" panose="020B0604020202020204" pitchFamily="34" charset="0"/>
-              </a:rPr>
-              <a:t>サーバ</a:t>
-            </a:r>
-            <a:endParaRPr lang="en-US" altLang="ja-JP" sz="1050" dirty="0">
-              <a:ln w="0"/>
+              </a:endParaRPr>
+            </a:p>
+          </p:txBody>
+        </p:sp>
+        <p:cxnSp>
+          <p:nvCxnSpPr>
+            <p:cNvPr id="17" name="直線矢印コネクタ 16">
+              <a:extLst>
+                <a:ext uri="{FF2B5EF4-FFF2-40B4-BE49-F238E27FC236}">
+                  <a16:creationId xmlns:a16="http://schemas.microsoft.com/office/drawing/2014/main" id="{C4D24FED-EDB4-7225-6914-4D0B195B07F3}"/>
+                </a:ext>
+              </a:extLst>
+            </p:cNvPr>
+            <p:cNvCxnSpPr>
+              <a:cxnSpLocks/>
+            </p:cNvCxnSpPr>
+            <p:nvPr/>
+          </p:nvCxnSpPr>
+          <p:spPr>
+            <a:xfrm>
+              <a:off x="1397174" y="3494817"/>
+              <a:ext cx="0" cy="523972"/>
+            </a:xfrm>
+            <a:prstGeom prst="straightConnector1">
+              <a:avLst/>
+            </a:prstGeom>
+            <a:ln w="19050" cap="rnd">
               <a:solidFill>
                 <a:schemeClr val="tx1"/>
               </a:solidFill>
-              <a:latin typeface="Arial" panose="020B0604020202020204" pitchFamily="34" charset="0"/>
-              <a:cs typeface="Arial" panose="020B0604020202020204" pitchFamily="34" charset="0"/>
-            </a:endParaRPr>
-          </a:p>
-        </p:txBody>
-      </p:sp>
-      <p:pic>
-        <p:nvPicPr>
-          <p:cNvPr id="60" name="Graphic 61439" descr="EC2 instance contents group icon. ">
-            <a:extLst>
-              <a:ext uri="{FF2B5EF4-FFF2-40B4-BE49-F238E27FC236}">
-                <a16:creationId xmlns:a16="http://schemas.microsoft.com/office/drawing/2014/main" id="{AC5F2091-080C-2631-31BA-58B8E9C91761}"/>
-              </a:ext>
-            </a:extLst>
-          </p:cNvPr>
-          <p:cNvPicPr>
-            <a:picLocks noChangeAspect="1"/>
-          </p:cNvPicPr>
-          <p:nvPr/>
-        </p:nvPicPr>
-        <p:blipFill>
-          <a:blip r:embed="rId13">
-            <a:extLst>
-              <a:ext uri="{96DAC541-7B7A-43D3-8B79-37D633B846F1}">
-                <asvg:svgBlip xmlns:asvg="http://schemas.microsoft.com/office/drawing/2016/SVG/main" r:embed="rId14"/>
-              </a:ext>
-            </a:extLst>
-          </a:blip>
-          <a:srcRect/>
-          <a:stretch/>
-        </p:blipFill>
-        <p:spPr>
-          <a:xfrm>
-            <a:off x="5072107" y="3244481"/>
-            <a:ext cx="381000" cy="381000"/>
-          </a:xfrm>
-          <a:prstGeom prst="rect">
-            <a:avLst/>
-          </a:prstGeom>
-        </p:spPr>
-      </p:pic>
-      <p:pic>
-        <p:nvPicPr>
-          <p:cNvPr id="61" name="Graphic 7" descr="Amazon Aurora service icon.">
-            <a:extLst>
-              <a:ext uri="{FF2B5EF4-FFF2-40B4-BE49-F238E27FC236}">
-                <a16:creationId xmlns:a16="http://schemas.microsoft.com/office/drawing/2014/main" id="{A24A1DDC-2AAB-DC5A-01D9-927F9EA5FBA0}"/>
-              </a:ext>
-            </a:extLst>
-          </p:cNvPr>
-          <p:cNvPicPr>
-            <a:picLocks noChangeAspect="1" noChangeArrowheads="1"/>
-          </p:cNvPicPr>
-          <p:nvPr/>
-        </p:nvPicPr>
-        <p:blipFill>
-          <a:blip r:embed="rId15">
-            <a:extLst>
-              <a:ext uri="{96DAC541-7B7A-43D3-8B79-37D633B846F1}">
-                <asvg:svgBlip xmlns:asvg="http://schemas.microsoft.com/office/drawing/2016/SVG/main" r:embed="rId16"/>
-              </a:ext>
-            </a:extLst>
-          </a:blip>
-          <a:srcRect/>
-          <a:stretch/>
-        </p:blipFill>
-        <p:spPr bwMode="auto">
-          <a:xfrm>
-            <a:off x="8490765" y="3797091"/>
-            <a:ext cx="432000" cy="432000"/>
-          </a:xfrm>
-          <a:prstGeom prst="rect">
-            <a:avLst/>
-          </a:prstGeom>
-          <a:noFill/>
-          <a:ln>
-            <a:noFill/>
-          </a:ln>
-          <a:extLst>
-            <a:ext uri="{909E8E84-426E-40DD-AFC4-6F175D3DCCD1}">
-              <a14:hiddenFill xmlns:a14="http://schemas.microsoft.com/office/drawing/2010/main">
-                <a:solidFill>
-                  <a:srgbClr val="FFFFFF"/>
-                </a:solidFill>
-              </a14:hiddenFill>
-            </a:ext>
-            <a:ext uri="{91240B29-F687-4F45-9708-019B960494DF}">
-              <a14:hiddenLine xmlns:a14="http://schemas.microsoft.com/office/drawing/2010/main" w="9525">
-                <a:solidFill>
-                  <a:srgbClr val="000000"/>
-                </a:solidFill>
-                <a:miter lim="800000"/>
-                <a:headEnd/>
-                <a:tailEnd/>
-              </a14:hiddenLine>
-            </a:ext>
-          </a:extLst>
-        </p:spPr>
-      </p:pic>
-      <p:sp>
-        <p:nvSpPr>
-          <p:cNvPr id="62" name="TextBox 9">
-            <a:extLst>
-              <a:ext uri="{FF2B5EF4-FFF2-40B4-BE49-F238E27FC236}">
-                <a16:creationId xmlns:a16="http://schemas.microsoft.com/office/drawing/2014/main" id="{FB96533C-A33A-742D-7473-7C156DB473FE}"/>
-              </a:ext>
-            </a:extLst>
-          </p:cNvPr>
-          <p:cNvSpPr txBox="1">
-            <a:spLocks noChangeArrowheads="1"/>
-          </p:cNvSpPr>
-          <p:nvPr/>
-        </p:nvSpPr>
-        <p:spPr bwMode="auto">
-          <a:xfrm>
-            <a:off x="7995134" y="4238432"/>
-            <a:ext cx="1414190" cy="430887"/>
-          </a:xfrm>
-          <a:prstGeom prst="rect">
-            <a:avLst/>
-          </a:prstGeom>
-          <a:noFill/>
-          <a:ln>
-            <a:noFill/>
-          </a:ln>
-          <a:extLst>
-            <a:ext uri="{909E8E84-426E-40DD-AFC4-6F175D3DCCD1}">
-              <a14:hiddenFill xmlns:a14="http://schemas.microsoft.com/office/drawing/2010/main">
-                <a:solidFill>
-                  <a:srgbClr val="FFFFFF"/>
-                </a:solidFill>
-              </a14:hiddenFill>
-            </a:ext>
-            <a:ext uri="{91240B29-F687-4F45-9708-019B960494DF}">
-              <a14:hiddenLine xmlns:a14="http://schemas.microsoft.com/office/drawing/2010/main" w="9525">
-                <a:solidFill>
-                  <a:srgbClr val="000000"/>
-                </a:solidFill>
-                <a:miter lim="800000"/>
-                <a:headEnd/>
-                <a:tailEnd/>
-              </a14:hiddenLine>
-            </a:ext>
-          </a:extLst>
-        </p:spPr>
-        <p:txBody>
-          <a:bodyPr wrap="square">
-            <a:spAutoFit/>
-          </a:bodyPr>
-          <a:lstStyle>
-            <a:lvl1pPr>
-              <a:defRPr>
-                <a:solidFill>
-                  <a:schemeClr val="tx1"/>
-                </a:solidFill>
-                <a:latin typeface="Calibri" panose="020F0502020204030204" pitchFamily="34" charset="0"/>
-              </a:defRPr>
-            </a:lvl1pPr>
-            <a:lvl2pPr marL="742950" indent="-285750">
-              <a:defRPr>
-                <a:solidFill>
-                  <a:schemeClr val="tx1"/>
-                </a:solidFill>
-                <a:latin typeface="Calibri" panose="020F0502020204030204" pitchFamily="34" charset="0"/>
-              </a:defRPr>
-            </a:lvl2pPr>
-            <a:lvl3pPr marL="1143000" indent="-228600">
-              <a:defRPr>
-                <a:solidFill>
-                  <a:schemeClr val="tx1"/>
-                </a:solidFill>
-                <a:latin typeface="Calibri" panose="020F0502020204030204" pitchFamily="34" charset="0"/>
-              </a:defRPr>
-            </a:lvl3pPr>
-            <a:lvl4pPr marL="1600200" indent="-228600">
-              <a:defRPr>
-                <a:solidFill>
-                  <a:schemeClr val="tx1"/>
-                </a:solidFill>
-                <a:latin typeface="Calibri" panose="020F0502020204030204" pitchFamily="34" charset="0"/>
-              </a:defRPr>
-            </a:lvl4pPr>
-            <a:lvl5pPr marL="2057400" indent="-228600">
-              <a:defRPr>
-                <a:solidFill>
-                  <a:schemeClr val="tx1"/>
-                </a:solidFill>
-                <a:latin typeface="Calibri" panose="020F0502020204030204" pitchFamily="34" charset="0"/>
-              </a:defRPr>
-            </a:lvl5pPr>
-            <a:lvl6pPr marL="2514600" indent="-228600" eaLnBrk="0" fontAlgn="base" hangingPunct="0">
-              <a:spcBef>
-                <a:spcPct val="0"/>
-              </a:spcBef>
-              <a:spcAft>
-                <a:spcPct val="0"/>
-              </a:spcAft>
-              <a:defRPr>
-                <a:solidFill>
-                  <a:schemeClr val="tx1"/>
-                </a:solidFill>
-                <a:latin typeface="Calibri" panose="020F0502020204030204" pitchFamily="34" charset="0"/>
-              </a:defRPr>
-            </a:lvl6pPr>
-            <a:lvl7pPr marL="2971800" indent="-228600" eaLnBrk="0" fontAlgn="base" hangingPunct="0">
-              <a:spcBef>
-                <a:spcPct val="0"/>
-              </a:spcBef>
-              <a:spcAft>
-                <a:spcPct val="0"/>
-              </a:spcAft>
-              <a:defRPr>
-                <a:solidFill>
-                  <a:schemeClr val="tx1"/>
-                </a:solidFill>
-                <a:latin typeface="Calibri" panose="020F0502020204030204" pitchFamily="34" charset="0"/>
-              </a:defRPr>
-            </a:lvl7pPr>
-            <a:lvl8pPr marL="3429000" indent="-228600" eaLnBrk="0" fontAlgn="base" hangingPunct="0">
-              <a:spcBef>
-                <a:spcPct val="0"/>
-              </a:spcBef>
-              <a:spcAft>
-                <a:spcPct val="0"/>
-              </a:spcAft>
-              <a:defRPr>
-                <a:solidFill>
-                  <a:schemeClr val="tx1"/>
-                </a:solidFill>
-                <a:latin typeface="Calibri" panose="020F0502020204030204" pitchFamily="34" charset="0"/>
-              </a:defRPr>
-            </a:lvl8pPr>
-            <a:lvl9pPr marL="3886200" indent="-228600" eaLnBrk="0" fontAlgn="base" hangingPunct="0">
-              <a:spcBef>
-                <a:spcPct val="0"/>
-              </a:spcBef>
-              <a:spcAft>
-                <a:spcPct val="0"/>
-              </a:spcAft>
-              <a:defRPr>
-                <a:solidFill>
-                  <a:schemeClr val="tx1"/>
-                </a:solidFill>
-                <a:latin typeface="Calibri" panose="020F0502020204030204" pitchFamily="34" charset="0"/>
-              </a:defRPr>
-            </a:lvl9pPr>
-          </a:lstStyle>
-          <a:p>
-            <a:pPr algn="ctr" eaLnBrk="1" hangingPunct="1"/>
-            <a:r>
-              <a:rPr lang="en-US" altLang="en-US" sz="1050" dirty="0">
-                <a:latin typeface="Arial" panose="020B0604020202020204" pitchFamily="34" charset="0"/>
-                <a:ea typeface="Amazon Ember" panose="020B0603020204020204" pitchFamily="34" charset="0"/>
-                <a:cs typeface="Arial" panose="020B0604020202020204" pitchFamily="34" charset="0"/>
-              </a:rPr>
-              <a:t>Amazon Aurora</a:t>
-            </a:r>
-          </a:p>
-          <a:p>
-            <a:pPr algn="ctr" eaLnBrk="1" hangingPunct="1"/>
-            <a:r>
-              <a:rPr lang="en-US" altLang="en-US" sz="1050" dirty="0" err="1">
-                <a:latin typeface="Arial" panose="020B0604020202020204" pitchFamily="34" charset="0"/>
-                <a:ea typeface="Amazon Ember" panose="020B0603020204020204" pitchFamily="34" charset="0"/>
-                <a:cs typeface="Arial" panose="020B0604020202020204" pitchFamily="34" charset="0"/>
-              </a:rPr>
-              <a:t>postgreSQL</a:t>
-            </a:r>
-            <a:endParaRPr lang="en-US" altLang="en-US" sz="1050" dirty="0">
-              <a:latin typeface="Arial" panose="020B0604020202020204" pitchFamily="34" charset="0"/>
-              <a:ea typeface="Amazon Ember" panose="020B0603020204020204" pitchFamily="34" charset="0"/>
-              <a:cs typeface="Arial" panose="020B0604020202020204" pitchFamily="34" charset="0"/>
-            </a:endParaRPr>
-          </a:p>
-        </p:txBody>
-      </p:sp>
-      <p:sp>
-        <p:nvSpPr>
-          <p:cNvPr id="66" name="角丸四角形 65">
-            <a:extLst>
-              <a:ext uri="{FF2B5EF4-FFF2-40B4-BE49-F238E27FC236}">
-                <a16:creationId xmlns:a16="http://schemas.microsoft.com/office/drawing/2014/main" id="{A8A0C8BF-BAA1-E314-6A68-380AEC5A28BE}"/>
-              </a:ext>
-            </a:extLst>
-          </p:cNvPr>
-          <p:cNvSpPr/>
-          <p:nvPr/>
-        </p:nvSpPr>
-        <p:spPr>
-          <a:xfrm>
-            <a:off x="5159529" y="3811995"/>
-            <a:ext cx="900000" cy="396000"/>
-          </a:xfrm>
-          <a:prstGeom prst="roundRect">
-            <a:avLst/>
-          </a:prstGeom>
-          <a:noFill/>
-          <a:ln>
-            <a:solidFill>
+              <a:tailEnd type="triangle"/>
+            </a:ln>
+          </p:spPr>
+          <p:style>
+            <a:lnRef idx="1">
+              <a:schemeClr val="accent1"/>
+            </a:lnRef>
+            <a:fillRef idx="0">
+              <a:schemeClr val="accent1"/>
+            </a:fillRef>
+            <a:effectRef idx="0">
+              <a:schemeClr val="accent1"/>
+            </a:effectRef>
+            <a:fontRef idx="minor">
               <a:schemeClr val="tx1"/>
-            </a:solidFill>
-          </a:ln>
-        </p:spPr>
-        <p:style>
-          <a:lnRef idx="2">
-            <a:schemeClr val="accent1">
-              <a:shade val="50000"/>
-            </a:schemeClr>
-          </a:lnRef>
-          <a:fillRef idx="1">
-            <a:schemeClr val="accent1"/>
-          </a:fillRef>
-          <a:effectRef idx="0">
-            <a:schemeClr val="accent1"/>
-          </a:effectRef>
-          <a:fontRef idx="minor">
-            <a:schemeClr val="lt1"/>
-          </a:fontRef>
-        </p:style>
-        <p:txBody>
-          <a:bodyPr rtlCol="0" anchor="ctr"/>
-          <a:lstStyle/>
-          <a:p>
-            <a:pPr algn="ctr"/>
-            <a:r>
-              <a:rPr kumimoji="1" lang="en-US" altLang="ja-JP" sz="1100" dirty="0"/>
-              <a:t>Stands Agent</a:t>
-            </a:r>
-            <a:endParaRPr kumimoji="1" lang="ja-JP" altLang="en-US" sz="1100" dirty="0" err="1"/>
-          </a:p>
-        </p:txBody>
-      </p:sp>
-      <p:sp>
-        <p:nvSpPr>
-          <p:cNvPr id="67" name="角丸四角形 66">
-            <a:extLst>
-              <a:ext uri="{FF2B5EF4-FFF2-40B4-BE49-F238E27FC236}">
-                <a16:creationId xmlns:a16="http://schemas.microsoft.com/office/drawing/2014/main" id="{B884FDD3-9565-BFE6-FD06-6BFAD329ECFF}"/>
-              </a:ext>
-            </a:extLst>
-          </p:cNvPr>
-          <p:cNvSpPr/>
-          <p:nvPr/>
-        </p:nvSpPr>
-        <p:spPr>
-          <a:xfrm>
-            <a:off x="5172640" y="4490734"/>
-            <a:ext cx="900000" cy="396000"/>
-          </a:xfrm>
-          <a:prstGeom prst="roundRect">
-            <a:avLst/>
-          </a:prstGeom>
-          <a:noFill/>
-          <a:ln>
-            <a:solidFill>
-              <a:schemeClr val="tx1"/>
-            </a:solidFill>
-          </a:ln>
-        </p:spPr>
-        <p:style>
-          <a:lnRef idx="2">
-            <a:schemeClr val="accent1">
-              <a:shade val="50000"/>
-            </a:schemeClr>
-          </a:lnRef>
-          <a:fillRef idx="1">
-            <a:schemeClr val="accent1"/>
-          </a:fillRef>
-          <a:effectRef idx="0">
-            <a:schemeClr val="accent1"/>
-          </a:effectRef>
-          <a:fontRef idx="minor">
-            <a:schemeClr val="lt1"/>
-          </a:fontRef>
-        </p:style>
-        <p:txBody>
-          <a:bodyPr rtlCol="0" anchor="ctr"/>
-          <a:lstStyle/>
-          <a:p>
-            <a:pPr algn="ctr"/>
-            <a:r>
-              <a:rPr kumimoji="1" lang="en-US" altLang="ja-JP" sz="1100" dirty="0"/>
-              <a:t>Amazon Q Developer</a:t>
-            </a:r>
-            <a:endParaRPr kumimoji="1" lang="ja-JP" altLang="en-US" sz="1100" dirty="0" err="1"/>
-          </a:p>
-        </p:txBody>
-      </p:sp>
-      <p:sp>
-        <p:nvSpPr>
-          <p:cNvPr id="68" name="角丸四角形 67">
-            <a:extLst>
-              <a:ext uri="{FF2B5EF4-FFF2-40B4-BE49-F238E27FC236}">
-                <a16:creationId xmlns:a16="http://schemas.microsoft.com/office/drawing/2014/main" id="{39E0B328-1AF5-8D3B-15DF-4640FAFFE5EC}"/>
-              </a:ext>
-            </a:extLst>
-          </p:cNvPr>
-          <p:cNvSpPr/>
-          <p:nvPr/>
-        </p:nvSpPr>
-        <p:spPr>
-          <a:xfrm>
-            <a:off x="6562452" y="3820943"/>
-            <a:ext cx="252000" cy="1080000"/>
-          </a:xfrm>
-          <a:prstGeom prst="roundRect">
-            <a:avLst/>
-          </a:prstGeom>
-          <a:noFill/>
-          <a:ln>
-            <a:solidFill>
-              <a:schemeClr val="tx1"/>
-            </a:solidFill>
-          </a:ln>
-        </p:spPr>
-        <p:style>
-          <a:lnRef idx="2">
-            <a:schemeClr val="accent1">
-              <a:shade val="50000"/>
-            </a:schemeClr>
-          </a:lnRef>
-          <a:fillRef idx="1">
-            <a:schemeClr val="accent1"/>
-          </a:fillRef>
-          <a:effectRef idx="0">
-            <a:schemeClr val="accent1"/>
-          </a:effectRef>
-          <a:fontRef idx="minor">
-            <a:schemeClr val="lt1"/>
-          </a:fontRef>
-        </p:style>
-        <p:txBody>
-          <a:bodyPr vert="eaVert" rtlCol="0" anchor="ctr"/>
-          <a:lstStyle/>
-          <a:p>
-            <a:pPr algn="ctr"/>
-            <a:r>
-              <a:rPr kumimoji="1" lang="en-US" altLang="ja-JP" sz="1100" dirty="0"/>
-              <a:t>MCP Server</a:t>
-            </a:r>
-            <a:endParaRPr kumimoji="1" lang="ja-JP" altLang="en-US" sz="1100" dirty="0" err="1"/>
-          </a:p>
-        </p:txBody>
-      </p:sp>
-      <p:sp>
-        <p:nvSpPr>
-          <p:cNvPr id="70" name="円柱 69">
-            <a:extLst>
-              <a:ext uri="{FF2B5EF4-FFF2-40B4-BE49-F238E27FC236}">
-                <a16:creationId xmlns:a16="http://schemas.microsoft.com/office/drawing/2014/main" id="{057A7E8D-F7D2-D9A0-0D0C-78848D699BA9}"/>
-              </a:ext>
-            </a:extLst>
-          </p:cNvPr>
-          <p:cNvSpPr/>
-          <p:nvPr/>
-        </p:nvSpPr>
-        <p:spPr>
-          <a:xfrm>
-            <a:off x="7277614" y="4334573"/>
-            <a:ext cx="540000" cy="576000"/>
-          </a:xfrm>
-          <a:prstGeom prst="can">
-            <a:avLst/>
-          </a:prstGeom>
-          <a:noFill/>
-          <a:ln>
-            <a:solidFill>
-              <a:schemeClr val="tx1"/>
-            </a:solidFill>
-          </a:ln>
-        </p:spPr>
-        <p:style>
-          <a:lnRef idx="2">
-            <a:schemeClr val="accent1">
-              <a:shade val="50000"/>
-            </a:schemeClr>
-          </a:lnRef>
-          <a:fillRef idx="1">
-            <a:schemeClr val="accent1"/>
-          </a:fillRef>
-          <a:effectRef idx="0">
-            <a:schemeClr val="accent1"/>
-          </a:effectRef>
-          <a:fontRef idx="minor">
-            <a:schemeClr val="lt1"/>
-          </a:fontRef>
-        </p:style>
-        <p:txBody>
-          <a:bodyPr wrap="none" rtlCol="0" anchor="ctr"/>
-          <a:lstStyle/>
-          <a:p>
-            <a:pPr algn="ctr"/>
-            <a:r>
-              <a:rPr kumimoji="1" lang="en-US" altLang="ja-JP" sz="1000" dirty="0"/>
-              <a:t>Oracle</a:t>
-            </a:r>
-          </a:p>
-          <a:p>
-            <a:pPr algn="ctr"/>
-            <a:r>
-              <a:rPr kumimoji="1" lang="en-US" altLang="ja-JP" sz="1000" dirty="0"/>
-              <a:t>DB</a:t>
-            </a:r>
-            <a:endParaRPr kumimoji="1" lang="ja-JP" altLang="en-US" sz="1000" dirty="0" err="1"/>
-          </a:p>
-        </p:txBody>
-      </p:sp>
-      <p:cxnSp>
-        <p:nvCxnSpPr>
-          <p:cNvPr id="76" name="直線矢印コネクタ 75">
-            <a:extLst>
-              <a:ext uri="{FF2B5EF4-FFF2-40B4-BE49-F238E27FC236}">
-                <a16:creationId xmlns:a16="http://schemas.microsoft.com/office/drawing/2014/main" id="{1494CD6B-D975-600C-E667-FA68F91B111F}"/>
-              </a:ext>
-            </a:extLst>
-          </p:cNvPr>
-          <p:cNvCxnSpPr>
-            <a:cxnSpLocks/>
-            <a:endCxn id="4" idx="1"/>
-          </p:cNvCxnSpPr>
-          <p:nvPr/>
-        </p:nvCxnSpPr>
-        <p:spPr>
-          <a:xfrm>
-            <a:off x="1449659" y="4323378"/>
-            <a:ext cx="1190017" cy="8549"/>
-          </a:xfrm>
-          <a:prstGeom prst="straightConnector1">
-            <a:avLst/>
-          </a:prstGeom>
-          <a:ln w="19050" cap="rnd">
-            <a:solidFill>
-              <a:schemeClr val="tx1"/>
-            </a:solidFill>
-            <a:tailEnd type="triangle"/>
-          </a:ln>
-        </p:spPr>
-        <p:style>
-          <a:lnRef idx="1">
-            <a:schemeClr val="accent1"/>
-          </a:lnRef>
-          <a:fillRef idx="0">
-            <a:schemeClr val="accent1"/>
-          </a:fillRef>
-          <a:effectRef idx="0">
-            <a:schemeClr val="accent1"/>
-          </a:effectRef>
-          <a:fontRef idx="minor">
-            <a:schemeClr val="tx1"/>
-          </a:fontRef>
-        </p:style>
-      </p:cxnSp>
-      <p:cxnSp>
-        <p:nvCxnSpPr>
-          <p:cNvPr id="79" name="直線矢印コネクタ 78">
-            <a:extLst>
-              <a:ext uri="{FF2B5EF4-FFF2-40B4-BE49-F238E27FC236}">
-                <a16:creationId xmlns:a16="http://schemas.microsoft.com/office/drawing/2014/main" id="{78321E9C-121B-886A-25CE-7D5154C0C2DC}"/>
-              </a:ext>
-            </a:extLst>
-          </p:cNvPr>
-          <p:cNvCxnSpPr>
-            <a:cxnSpLocks/>
-          </p:cNvCxnSpPr>
-          <p:nvPr/>
-        </p:nvCxnSpPr>
-        <p:spPr>
-          <a:xfrm>
-            <a:off x="6079407" y="3993213"/>
-            <a:ext cx="468000" cy="0"/>
-          </a:xfrm>
-          <a:prstGeom prst="straightConnector1">
-            <a:avLst/>
-          </a:prstGeom>
-          <a:ln w="19050" cap="rnd">
-            <a:solidFill>
-              <a:schemeClr val="tx1"/>
-            </a:solidFill>
-            <a:tailEnd type="triangle"/>
-          </a:ln>
-        </p:spPr>
-        <p:style>
-          <a:lnRef idx="1">
-            <a:schemeClr val="accent1"/>
-          </a:lnRef>
-          <a:fillRef idx="0">
-            <a:schemeClr val="accent1"/>
-          </a:fillRef>
-          <a:effectRef idx="0">
-            <a:schemeClr val="accent1"/>
-          </a:effectRef>
-          <a:fontRef idx="minor">
-            <a:schemeClr val="tx1"/>
-          </a:fontRef>
-        </p:style>
-      </p:cxnSp>
-      <p:cxnSp>
-        <p:nvCxnSpPr>
-          <p:cNvPr id="82" name="直線矢印コネクタ 81">
-            <a:extLst>
-              <a:ext uri="{FF2B5EF4-FFF2-40B4-BE49-F238E27FC236}">
-                <a16:creationId xmlns:a16="http://schemas.microsoft.com/office/drawing/2014/main" id="{5D9930D2-04BE-1E36-3CC4-A7890FC10B0F}"/>
-              </a:ext>
-            </a:extLst>
-          </p:cNvPr>
-          <p:cNvCxnSpPr>
-            <a:cxnSpLocks/>
-          </p:cNvCxnSpPr>
-          <p:nvPr/>
-        </p:nvCxnSpPr>
-        <p:spPr>
-          <a:xfrm>
-            <a:off x="6092518" y="4688734"/>
-            <a:ext cx="468000" cy="0"/>
-          </a:xfrm>
-          <a:prstGeom prst="straightConnector1">
-            <a:avLst/>
-          </a:prstGeom>
-          <a:ln w="19050" cap="rnd">
-            <a:solidFill>
-              <a:schemeClr val="tx1"/>
-            </a:solidFill>
-            <a:tailEnd type="triangle"/>
-          </a:ln>
-        </p:spPr>
-        <p:style>
-          <a:lnRef idx="1">
-            <a:schemeClr val="accent1"/>
-          </a:lnRef>
-          <a:fillRef idx="0">
-            <a:schemeClr val="accent1"/>
-          </a:fillRef>
-          <a:effectRef idx="0">
-            <a:schemeClr val="accent1"/>
-          </a:effectRef>
-          <a:fontRef idx="minor">
-            <a:schemeClr val="tx1"/>
-          </a:fontRef>
-        </p:style>
-      </p:cxnSp>
-      <p:cxnSp>
-        <p:nvCxnSpPr>
-          <p:cNvPr id="86" name="直線矢印コネクタ 85">
-            <a:extLst>
-              <a:ext uri="{FF2B5EF4-FFF2-40B4-BE49-F238E27FC236}">
-                <a16:creationId xmlns:a16="http://schemas.microsoft.com/office/drawing/2014/main" id="{BB009A0A-CA29-3898-080B-F67A5ADEC5A2}"/>
-              </a:ext>
-            </a:extLst>
-          </p:cNvPr>
-          <p:cNvCxnSpPr>
-            <a:cxnSpLocks/>
-          </p:cNvCxnSpPr>
-          <p:nvPr/>
-        </p:nvCxnSpPr>
-        <p:spPr>
-          <a:xfrm>
-            <a:off x="6814452" y="3993213"/>
-            <a:ext cx="1658151" cy="0"/>
-          </a:xfrm>
-          <a:prstGeom prst="straightConnector1">
-            <a:avLst/>
-          </a:prstGeom>
-          <a:ln w="19050" cap="rnd">
-            <a:solidFill>
-              <a:schemeClr val="tx1"/>
-            </a:solidFill>
-            <a:tailEnd type="triangle"/>
-          </a:ln>
-        </p:spPr>
-        <p:style>
-          <a:lnRef idx="1">
-            <a:schemeClr val="accent1"/>
-          </a:lnRef>
-          <a:fillRef idx="0">
-            <a:schemeClr val="accent1"/>
-          </a:fillRef>
-          <a:effectRef idx="0">
-            <a:schemeClr val="accent1"/>
-          </a:effectRef>
-          <a:fontRef idx="minor">
-            <a:schemeClr val="tx1"/>
-          </a:fontRef>
-        </p:style>
-      </p:cxnSp>
-      <p:cxnSp>
-        <p:nvCxnSpPr>
-          <p:cNvPr id="93" name="直線矢印コネクタ 92">
-            <a:extLst>
-              <a:ext uri="{FF2B5EF4-FFF2-40B4-BE49-F238E27FC236}">
-                <a16:creationId xmlns:a16="http://schemas.microsoft.com/office/drawing/2014/main" id="{D4BACEBA-2616-F53B-27F9-3E09E213DD44}"/>
-              </a:ext>
-            </a:extLst>
-          </p:cNvPr>
-          <p:cNvCxnSpPr>
-            <a:cxnSpLocks/>
-          </p:cNvCxnSpPr>
-          <p:nvPr/>
-        </p:nvCxnSpPr>
-        <p:spPr>
-          <a:xfrm>
-            <a:off x="6827853" y="4689510"/>
-            <a:ext cx="468000" cy="0"/>
-          </a:xfrm>
-          <a:prstGeom prst="straightConnector1">
-            <a:avLst/>
-          </a:prstGeom>
-          <a:ln w="19050" cap="rnd">
-            <a:solidFill>
-              <a:schemeClr val="tx1"/>
-            </a:solidFill>
-            <a:tailEnd type="triangle"/>
-          </a:ln>
-        </p:spPr>
-        <p:style>
-          <a:lnRef idx="1">
-            <a:schemeClr val="accent1"/>
-          </a:lnRef>
-          <a:fillRef idx="0">
-            <a:schemeClr val="accent1"/>
-          </a:fillRef>
-          <a:effectRef idx="0">
-            <a:schemeClr val="accent1"/>
-          </a:effectRef>
-          <a:fontRef idx="minor">
-            <a:schemeClr val="tx1"/>
-          </a:fontRef>
-        </p:style>
-      </p:cxnSp>
-      <p:sp>
-        <p:nvSpPr>
-          <p:cNvPr id="95" name="TextBox 30">
-            <a:extLst>
-              <a:ext uri="{FF2B5EF4-FFF2-40B4-BE49-F238E27FC236}">
-                <a16:creationId xmlns:a16="http://schemas.microsoft.com/office/drawing/2014/main" id="{F942525D-4F4E-0C6C-54F5-28689639BA70}"/>
-              </a:ext>
-            </a:extLst>
-          </p:cNvPr>
-          <p:cNvSpPr txBox="1">
-            <a:spLocks noChangeArrowheads="1"/>
-          </p:cNvSpPr>
-          <p:nvPr/>
-        </p:nvSpPr>
-        <p:spPr bwMode="auto">
-          <a:xfrm>
-            <a:off x="488105" y="4558328"/>
-            <a:ext cx="1135585" cy="253916"/>
-          </a:xfrm>
-          <a:prstGeom prst="rect">
-            <a:avLst/>
-          </a:prstGeom>
-          <a:noFill/>
-          <a:ln>
-            <a:noFill/>
-          </a:ln>
-          <a:extLst>
-            <a:ext uri="{909E8E84-426E-40DD-AFC4-6F175D3DCCD1}">
-              <a14:hiddenFill xmlns:a14="http://schemas.microsoft.com/office/drawing/2010/main">
-                <a:solidFill>
-                  <a:srgbClr val="FFFFFF"/>
-                </a:solidFill>
-              </a14:hiddenFill>
-            </a:ext>
-            <a:ext uri="{91240B29-F687-4F45-9708-019B960494DF}">
-              <a14:hiddenLine xmlns:a14="http://schemas.microsoft.com/office/drawing/2010/main" w="9525">
-                <a:solidFill>
-                  <a:srgbClr val="000000"/>
-                </a:solidFill>
-                <a:miter lim="800000"/>
-                <a:headEnd/>
-                <a:tailEnd/>
-              </a14:hiddenLine>
-            </a:ext>
-          </a:extLst>
-        </p:spPr>
-        <p:txBody>
-          <a:bodyPr wrap="square">
-            <a:spAutoFit/>
-          </a:bodyPr>
-          <a:lstStyle>
-            <a:lvl1pPr>
-              <a:defRPr>
-                <a:solidFill>
-                  <a:schemeClr val="tx1"/>
-                </a:solidFill>
-                <a:latin typeface="Calibri" panose="020F0502020204030204" pitchFamily="34" charset="0"/>
-              </a:defRPr>
-            </a:lvl1pPr>
-            <a:lvl2pPr marL="742950" indent="-285750">
-              <a:defRPr>
-                <a:solidFill>
-                  <a:schemeClr val="tx1"/>
-                </a:solidFill>
-                <a:latin typeface="Calibri" panose="020F0502020204030204" pitchFamily="34" charset="0"/>
-              </a:defRPr>
-            </a:lvl2pPr>
-            <a:lvl3pPr marL="1143000" indent="-228600">
-              <a:defRPr>
-                <a:solidFill>
-                  <a:schemeClr val="tx1"/>
-                </a:solidFill>
-                <a:latin typeface="Calibri" panose="020F0502020204030204" pitchFamily="34" charset="0"/>
-              </a:defRPr>
-            </a:lvl3pPr>
-            <a:lvl4pPr marL="1600200" indent="-228600">
-              <a:defRPr>
-                <a:solidFill>
-                  <a:schemeClr val="tx1"/>
-                </a:solidFill>
-                <a:latin typeface="Calibri" panose="020F0502020204030204" pitchFamily="34" charset="0"/>
-              </a:defRPr>
-            </a:lvl4pPr>
-            <a:lvl5pPr marL="2057400" indent="-228600">
-              <a:defRPr>
-                <a:solidFill>
-                  <a:schemeClr val="tx1"/>
-                </a:solidFill>
-                <a:latin typeface="Calibri" panose="020F0502020204030204" pitchFamily="34" charset="0"/>
-              </a:defRPr>
-            </a:lvl5pPr>
-            <a:lvl6pPr marL="2514600" indent="-228600" eaLnBrk="0" fontAlgn="base" hangingPunct="0">
-              <a:spcBef>
-                <a:spcPct val="0"/>
-              </a:spcBef>
-              <a:spcAft>
-                <a:spcPct val="0"/>
-              </a:spcAft>
-              <a:defRPr>
-                <a:solidFill>
-                  <a:schemeClr val="tx1"/>
-                </a:solidFill>
-                <a:latin typeface="Calibri" panose="020F0502020204030204" pitchFamily="34" charset="0"/>
-              </a:defRPr>
-            </a:lvl6pPr>
-            <a:lvl7pPr marL="2971800" indent="-228600" eaLnBrk="0" fontAlgn="base" hangingPunct="0">
-              <a:spcBef>
-                <a:spcPct val="0"/>
-              </a:spcBef>
-              <a:spcAft>
-                <a:spcPct val="0"/>
-              </a:spcAft>
-              <a:defRPr>
-                <a:solidFill>
-                  <a:schemeClr val="tx1"/>
-                </a:solidFill>
-                <a:latin typeface="Calibri" panose="020F0502020204030204" pitchFamily="34" charset="0"/>
-              </a:defRPr>
-            </a:lvl7pPr>
-            <a:lvl8pPr marL="3429000" indent="-228600" eaLnBrk="0" fontAlgn="base" hangingPunct="0">
-              <a:spcBef>
-                <a:spcPct val="0"/>
-              </a:spcBef>
-              <a:spcAft>
-                <a:spcPct val="0"/>
-              </a:spcAft>
-              <a:defRPr>
-                <a:solidFill>
-                  <a:schemeClr val="tx1"/>
-                </a:solidFill>
-                <a:latin typeface="Calibri" panose="020F0502020204030204" pitchFamily="34" charset="0"/>
-              </a:defRPr>
-            </a:lvl8pPr>
-            <a:lvl9pPr marL="3886200" indent="-228600" eaLnBrk="0" fontAlgn="base" hangingPunct="0">
-              <a:spcBef>
-                <a:spcPct val="0"/>
-              </a:spcBef>
-              <a:spcAft>
-                <a:spcPct val="0"/>
-              </a:spcAft>
-              <a:defRPr>
-                <a:solidFill>
-                  <a:schemeClr val="tx1"/>
-                </a:solidFill>
-                <a:latin typeface="Calibri" panose="020F0502020204030204" pitchFamily="34" charset="0"/>
-              </a:defRPr>
-            </a:lvl9pPr>
-          </a:lstStyle>
-          <a:p>
-            <a:pPr algn="ctr" eaLnBrk="1" hangingPunct="1"/>
-            <a:r>
-              <a:rPr lang="en-US" altLang="en-US" sz="1050" dirty="0" err="1">
-                <a:latin typeface="Arial" panose="020B0604020202020204" pitchFamily="34" charset="0"/>
-                <a:cs typeface="Arial" panose="020B0604020202020204" pitchFamily="34" charset="0"/>
-              </a:rPr>
-              <a:t>ユーザ</a:t>
-            </a:r>
-            <a:endParaRPr lang="en-US" altLang="en-US" sz="1050" dirty="0">
-              <a:latin typeface="Arial" panose="020B0604020202020204" pitchFamily="34" charset="0"/>
-              <a:cs typeface="Arial" panose="020B0604020202020204" pitchFamily="34" charset="0"/>
-            </a:endParaRPr>
-          </a:p>
-        </p:txBody>
-      </p:sp>
-      <p:pic>
-        <p:nvPicPr>
-          <p:cNvPr id="4" name="Graphic 6" descr="Endpoint resource icon for the Amazon API Gateway service.">
-            <a:extLst>
-              <a:ext uri="{FF2B5EF4-FFF2-40B4-BE49-F238E27FC236}">
-                <a16:creationId xmlns:a16="http://schemas.microsoft.com/office/drawing/2014/main" id="{C1A8859B-82F8-F76E-D109-DE287A32E1C0}"/>
-              </a:ext>
-            </a:extLst>
-          </p:cNvPr>
-          <p:cNvPicPr>
-            <a:picLocks noChangeAspect="1" noChangeArrowheads="1"/>
-          </p:cNvPicPr>
-          <p:nvPr/>
-        </p:nvPicPr>
-        <p:blipFill>
-          <a:blip r:embed="rId17">
-            <a:extLst>
-              <a:ext uri="{96DAC541-7B7A-43D3-8B79-37D633B846F1}">
-                <asvg:svgBlip xmlns:asvg="http://schemas.microsoft.com/office/drawing/2016/SVG/main" r:embed="rId18"/>
-              </a:ext>
-            </a:extLst>
-          </a:blip>
-          <a:srcRect/>
-          <a:stretch/>
-        </p:blipFill>
-        <p:spPr bwMode="auto">
-          <a:xfrm>
-            <a:off x="2639676" y="4103327"/>
-            <a:ext cx="457200" cy="457200"/>
-          </a:xfrm>
-          <a:prstGeom prst="rect">
-            <a:avLst/>
-          </a:prstGeom>
-          <a:noFill/>
-          <a:ln>
-            <a:noFill/>
-          </a:ln>
-          <a:extLst>
-            <a:ext uri="{909E8E84-426E-40DD-AFC4-6F175D3DCCD1}">
-              <a14:hiddenFill xmlns:a14="http://schemas.microsoft.com/office/drawing/2010/main">
-                <a:solidFill>
-                  <a:srgbClr val="FFFFFF"/>
-                </a:solidFill>
-              </a14:hiddenFill>
-            </a:ext>
-            <a:ext uri="{91240B29-F687-4F45-9708-019B960494DF}">
-              <a14:hiddenLine xmlns:a14="http://schemas.microsoft.com/office/drawing/2010/main" w="9525">
-                <a:solidFill>
-                  <a:srgbClr val="000000"/>
-                </a:solidFill>
-                <a:miter lim="800000"/>
-                <a:headEnd/>
-                <a:tailEnd/>
-              </a14:hiddenLine>
-            </a:ext>
-          </a:extLst>
-        </p:spPr>
-      </p:pic>
-      <p:sp>
-        <p:nvSpPr>
-          <p:cNvPr id="5" name="TextBox 16">
-            <a:extLst>
-              <a:ext uri="{FF2B5EF4-FFF2-40B4-BE49-F238E27FC236}">
-                <a16:creationId xmlns:a16="http://schemas.microsoft.com/office/drawing/2014/main" id="{8D876428-C144-EEF0-D77F-972B29910159}"/>
-              </a:ext>
-            </a:extLst>
-          </p:cNvPr>
-          <p:cNvSpPr txBox="1">
-            <a:spLocks noChangeArrowheads="1"/>
-          </p:cNvSpPr>
-          <p:nvPr/>
-        </p:nvSpPr>
-        <p:spPr bwMode="auto">
-          <a:xfrm>
-            <a:off x="2224375" y="4539996"/>
-            <a:ext cx="1468727" cy="430887"/>
-          </a:xfrm>
-          <a:prstGeom prst="rect">
-            <a:avLst/>
-          </a:prstGeom>
-          <a:noFill/>
-          <a:ln>
-            <a:noFill/>
-          </a:ln>
-          <a:extLst>
-            <a:ext uri="{909E8E84-426E-40DD-AFC4-6F175D3DCCD1}">
-              <a14:hiddenFill xmlns:a14="http://schemas.microsoft.com/office/drawing/2010/main">
-                <a:solidFill>
-                  <a:srgbClr val="FFFFFF"/>
-                </a:solidFill>
-              </a14:hiddenFill>
-            </a:ext>
-            <a:ext uri="{91240B29-F687-4F45-9708-019B960494DF}">
-              <a14:hiddenLine xmlns:a14="http://schemas.microsoft.com/office/drawing/2010/main" w="9525">
-                <a:solidFill>
-                  <a:srgbClr val="000000"/>
-                </a:solidFill>
-                <a:miter lim="800000"/>
-                <a:headEnd/>
-                <a:tailEnd/>
-              </a14:hiddenLine>
-            </a:ext>
-          </a:extLst>
-        </p:spPr>
-        <p:txBody>
-          <a:bodyPr wrap="square">
-            <a:spAutoFit/>
-          </a:bodyPr>
-          <a:lstStyle>
-            <a:lvl1pPr>
-              <a:defRPr>
-                <a:solidFill>
-                  <a:schemeClr val="tx1"/>
-                </a:solidFill>
-                <a:latin typeface="Calibri" panose="020F0502020204030204" pitchFamily="34" charset="0"/>
-              </a:defRPr>
-            </a:lvl1pPr>
-            <a:lvl2pPr marL="742950" indent="-285750">
-              <a:defRPr>
-                <a:solidFill>
-                  <a:schemeClr val="tx1"/>
-                </a:solidFill>
-                <a:latin typeface="Calibri" panose="020F0502020204030204" pitchFamily="34" charset="0"/>
-              </a:defRPr>
-            </a:lvl2pPr>
-            <a:lvl3pPr marL="1143000" indent="-228600">
-              <a:defRPr>
-                <a:solidFill>
-                  <a:schemeClr val="tx1"/>
-                </a:solidFill>
-                <a:latin typeface="Calibri" panose="020F0502020204030204" pitchFamily="34" charset="0"/>
-              </a:defRPr>
-            </a:lvl3pPr>
-            <a:lvl4pPr marL="1600200" indent="-228600">
-              <a:defRPr>
-                <a:solidFill>
-                  <a:schemeClr val="tx1"/>
-                </a:solidFill>
-                <a:latin typeface="Calibri" panose="020F0502020204030204" pitchFamily="34" charset="0"/>
-              </a:defRPr>
-            </a:lvl4pPr>
-            <a:lvl5pPr marL="2057400" indent="-228600">
-              <a:defRPr>
-                <a:solidFill>
-                  <a:schemeClr val="tx1"/>
-                </a:solidFill>
-                <a:latin typeface="Calibri" panose="020F0502020204030204" pitchFamily="34" charset="0"/>
-              </a:defRPr>
-            </a:lvl5pPr>
-            <a:lvl6pPr marL="2514600" indent="-228600" eaLnBrk="0" fontAlgn="base" hangingPunct="0">
-              <a:spcBef>
-                <a:spcPct val="0"/>
-              </a:spcBef>
-              <a:spcAft>
-                <a:spcPct val="0"/>
-              </a:spcAft>
-              <a:defRPr>
-                <a:solidFill>
-                  <a:schemeClr val="tx1"/>
-                </a:solidFill>
-                <a:latin typeface="Calibri" panose="020F0502020204030204" pitchFamily="34" charset="0"/>
-              </a:defRPr>
-            </a:lvl6pPr>
-            <a:lvl7pPr marL="2971800" indent="-228600" eaLnBrk="0" fontAlgn="base" hangingPunct="0">
-              <a:spcBef>
-                <a:spcPct val="0"/>
-              </a:spcBef>
-              <a:spcAft>
-                <a:spcPct val="0"/>
-              </a:spcAft>
-              <a:defRPr>
-                <a:solidFill>
-                  <a:schemeClr val="tx1"/>
-                </a:solidFill>
-                <a:latin typeface="Calibri" panose="020F0502020204030204" pitchFamily="34" charset="0"/>
-              </a:defRPr>
-            </a:lvl7pPr>
-            <a:lvl8pPr marL="3429000" indent="-228600" eaLnBrk="0" fontAlgn="base" hangingPunct="0">
-              <a:spcBef>
-                <a:spcPct val="0"/>
-              </a:spcBef>
-              <a:spcAft>
-                <a:spcPct val="0"/>
-              </a:spcAft>
-              <a:defRPr>
-                <a:solidFill>
-                  <a:schemeClr val="tx1"/>
-                </a:solidFill>
-                <a:latin typeface="Calibri" panose="020F0502020204030204" pitchFamily="34" charset="0"/>
-              </a:defRPr>
-            </a:lvl8pPr>
-            <a:lvl9pPr marL="3886200" indent="-228600" eaLnBrk="0" fontAlgn="base" hangingPunct="0">
-              <a:spcBef>
-                <a:spcPct val="0"/>
-              </a:spcBef>
-              <a:spcAft>
-                <a:spcPct val="0"/>
-              </a:spcAft>
-              <a:defRPr>
-                <a:solidFill>
-                  <a:schemeClr val="tx1"/>
-                </a:solidFill>
-                <a:latin typeface="Calibri" panose="020F0502020204030204" pitchFamily="34" charset="0"/>
-              </a:defRPr>
-            </a:lvl9pPr>
-          </a:lstStyle>
-          <a:p>
-            <a:pPr algn="ctr" eaLnBrk="1" hangingPunct="1"/>
-            <a:r>
-              <a:rPr lang="en-US" altLang="en-US" sz="1100" dirty="0">
-                <a:latin typeface="Arial" panose="020B0604020202020204" pitchFamily="34" charset="0"/>
-                <a:ea typeface="Amazon Ember" panose="020B0603020204020204" pitchFamily="34" charset="0"/>
-                <a:cs typeface="Arial" panose="020B0604020202020204" pitchFamily="34" charset="0"/>
-              </a:rPr>
-              <a:t>EC2 Instance Connect Endpoint</a:t>
-            </a:r>
-          </a:p>
-        </p:txBody>
-      </p:sp>
-      <p:pic>
-        <p:nvPicPr>
-          <p:cNvPr id="6" name="Graphic 31" descr="Elastic network interface resource icon for the Amazon VPC service.&#10;">
-            <a:extLst>
-              <a:ext uri="{FF2B5EF4-FFF2-40B4-BE49-F238E27FC236}">
-                <a16:creationId xmlns:a16="http://schemas.microsoft.com/office/drawing/2014/main" id="{0E9D5816-5E4C-9C02-1968-4A73F55F1DEC}"/>
-              </a:ext>
-            </a:extLst>
-          </p:cNvPr>
-          <p:cNvPicPr>
-            <a:picLocks noChangeAspect="1"/>
-          </p:cNvPicPr>
-          <p:nvPr/>
-        </p:nvPicPr>
-        <p:blipFill>
-          <a:blip r:embed="rId19">
-            <a:extLst>
-              <a:ext uri="{96DAC541-7B7A-43D3-8B79-37D633B846F1}">
-                <asvg:svgBlip xmlns:asvg="http://schemas.microsoft.com/office/drawing/2016/SVG/main" r:embed="rId20"/>
-              </a:ext>
-            </a:extLst>
-          </a:blip>
-          <a:stretch>
-            <a:fillRect/>
-          </a:stretch>
-        </p:blipFill>
-        <p:spPr>
-          <a:xfrm>
-            <a:off x="4321335" y="4092176"/>
-            <a:ext cx="457200" cy="457200"/>
-          </a:xfrm>
-          <a:prstGeom prst="rect">
-            <a:avLst/>
-          </a:prstGeom>
-        </p:spPr>
-      </p:pic>
-      <p:sp>
-        <p:nvSpPr>
-          <p:cNvPr id="7" name="TextBox 18">
-            <a:extLst>
-              <a:ext uri="{FF2B5EF4-FFF2-40B4-BE49-F238E27FC236}">
-                <a16:creationId xmlns:a16="http://schemas.microsoft.com/office/drawing/2014/main" id="{048344A8-5C99-9C36-7FF1-8516FD82302E}"/>
-              </a:ext>
-            </a:extLst>
-          </p:cNvPr>
-          <p:cNvSpPr txBox="1">
-            <a:spLocks noChangeArrowheads="1"/>
-          </p:cNvSpPr>
-          <p:nvPr/>
-        </p:nvSpPr>
-        <p:spPr bwMode="auto">
-          <a:xfrm>
-            <a:off x="3878509" y="4534028"/>
-            <a:ext cx="1342852" cy="430887"/>
-          </a:xfrm>
-          <a:prstGeom prst="rect">
-            <a:avLst/>
-          </a:prstGeom>
-          <a:noFill/>
-          <a:ln>
-            <a:noFill/>
-          </a:ln>
-          <a:extLst>
-            <a:ext uri="{909E8E84-426E-40DD-AFC4-6F175D3DCCD1}">
-              <a14:hiddenFill xmlns:a14="http://schemas.microsoft.com/office/drawing/2010/main">
-                <a:solidFill>
-                  <a:srgbClr val="FFFFFF"/>
-                </a:solidFill>
-              </a14:hiddenFill>
-            </a:ext>
-            <a:ext uri="{91240B29-F687-4F45-9708-019B960494DF}">
-              <a14:hiddenLine xmlns:a14="http://schemas.microsoft.com/office/drawing/2010/main" w="9525">
-                <a:solidFill>
-                  <a:srgbClr val="000000"/>
-                </a:solidFill>
-                <a:miter lim="800000"/>
-                <a:headEnd/>
-                <a:tailEnd/>
-              </a14:hiddenLine>
-            </a:ext>
-          </a:extLst>
-        </p:spPr>
-        <p:txBody>
-          <a:bodyPr wrap="square">
-            <a:spAutoFit/>
-          </a:bodyPr>
-          <a:lstStyle>
-            <a:lvl1pPr>
-              <a:defRPr>
-                <a:solidFill>
-                  <a:schemeClr val="tx1"/>
-                </a:solidFill>
-                <a:latin typeface="Calibri" panose="020F0502020204030204" pitchFamily="34" charset="0"/>
-              </a:defRPr>
-            </a:lvl1pPr>
-            <a:lvl2pPr marL="742950" indent="-285750">
-              <a:defRPr>
-                <a:solidFill>
-                  <a:schemeClr val="tx1"/>
-                </a:solidFill>
-                <a:latin typeface="Calibri" panose="020F0502020204030204" pitchFamily="34" charset="0"/>
-              </a:defRPr>
-            </a:lvl2pPr>
-            <a:lvl3pPr marL="1143000" indent="-228600">
-              <a:defRPr>
-                <a:solidFill>
-                  <a:schemeClr val="tx1"/>
-                </a:solidFill>
-                <a:latin typeface="Calibri" panose="020F0502020204030204" pitchFamily="34" charset="0"/>
-              </a:defRPr>
-            </a:lvl3pPr>
-            <a:lvl4pPr marL="1600200" indent="-228600">
-              <a:defRPr>
-                <a:solidFill>
-                  <a:schemeClr val="tx1"/>
-                </a:solidFill>
-                <a:latin typeface="Calibri" panose="020F0502020204030204" pitchFamily="34" charset="0"/>
-              </a:defRPr>
-            </a:lvl4pPr>
-            <a:lvl5pPr marL="2057400" indent="-228600">
-              <a:defRPr>
-                <a:solidFill>
-                  <a:schemeClr val="tx1"/>
-                </a:solidFill>
-                <a:latin typeface="Calibri" panose="020F0502020204030204" pitchFamily="34" charset="0"/>
-              </a:defRPr>
-            </a:lvl5pPr>
-            <a:lvl6pPr marL="2514600" indent="-228600" eaLnBrk="0" fontAlgn="base" hangingPunct="0">
-              <a:spcBef>
-                <a:spcPct val="0"/>
-              </a:spcBef>
-              <a:spcAft>
-                <a:spcPct val="0"/>
-              </a:spcAft>
-              <a:defRPr>
-                <a:solidFill>
-                  <a:schemeClr val="tx1"/>
-                </a:solidFill>
-                <a:latin typeface="Calibri" panose="020F0502020204030204" pitchFamily="34" charset="0"/>
-              </a:defRPr>
-            </a:lvl6pPr>
-            <a:lvl7pPr marL="2971800" indent="-228600" eaLnBrk="0" fontAlgn="base" hangingPunct="0">
-              <a:spcBef>
-                <a:spcPct val="0"/>
-              </a:spcBef>
-              <a:spcAft>
-                <a:spcPct val="0"/>
-              </a:spcAft>
-              <a:defRPr>
-                <a:solidFill>
-                  <a:schemeClr val="tx1"/>
-                </a:solidFill>
-                <a:latin typeface="Calibri" panose="020F0502020204030204" pitchFamily="34" charset="0"/>
-              </a:defRPr>
-            </a:lvl7pPr>
-            <a:lvl8pPr marL="3429000" indent="-228600" eaLnBrk="0" fontAlgn="base" hangingPunct="0">
-              <a:spcBef>
-                <a:spcPct val="0"/>
-              </a:spcBef>
-              <a:spcAft>
-                <a:spcPct val="0"/>
-              </a:spcAft>
-              <a:defRPr>
-                <a:solidFill>
-                  <a:schemeClr val="tx1"/>
-                </a:solidFill>
-                <a:latin typeface="Calibri" panose="020F0502020204030204" pitchFamily="34" charset="0"/>
-              </a:defRPr>
-            </a:lvl8pPr>
-            <a:lvl9pPr marL="3886200" indent="-228600" eaLnBrk="0" fontAlgn="base" hangingPunct="0">
-              <a:spcBef>
-                <a:spcPct val="0"/>
-              </a:spcBef>
-              <a:spcAft>
-                <a:spcPct val="0"/>
-              </a:spcAft>
-              <a:defRPr>
-                <a:solidFill>
-                  <a:schemeClr val="tx1"/>
-                </a:solidFill>
-                <a:latin typeface="Calibri" panose="020F0502020204030204" pitchFamily="34" charset="0"/>
-              </a:defRPr>
-            </a:lvl9pPr>
-          </a:lstStyle>
-          <a:p>
-            <a:pPr algn="ctr" eaLnBrk="1" hangingPunct="1"/>
-            <a:r>
-              <a:rPr lang="en-US" altLang="en-US" sz="1100" dirty="0">
-                <a:latin typeface="Arial" panose="020B0604020202020204" pitchFamily="34" charset="0"/>
-                <a:ea typeface="Amazon Ember" panose="020B0603020204020204" pitchFamily="34" charset="0"/>
-                <a:cs typeface="Arial" panose="020B0604020202020204" pitchFamily="34" charset="0"/>
-              </a:rPr>
-              <a:t>Elastic network interface</a:t>
-            </a:r>
-          </a:p>
-        </p:txBody>
-      </p:sp>
-      <p:cxnSp>
-        <p:nvCxnSpPr>
-          <p:cNvPr id="12" name="直線矢印コネクタ 11">
-            <a:extLst>
-              <a:ext uri="{FF2B5EF4-FFF2-40B4-BE49-F238E27FC236}">
-                <a16:creationId xmlns:a16="http://schemas.microsoft.com/office/drawing/2014/main" id="{B8E0C7D4-5407-E31D-D715-EB067CE56438}"/>
-              </a:ext>
-            </a:extLst>
-          </p:cNvPr>
-          <p:cNvCxnSpPr>
-            <a:cxnSpLocks/>
-          </p:cNvCxnSpPr>
-          <p:nvPr/>
-        </p:nvCxnSpPr>
-        <p:spPr>
-          <a:xfrm>
-            <a:off x="3085943" y="4307144"/>
-            <a:ext cx="1190017" cy="8549"/>
-          </a:xfrm>
-          <a:prstGeom prst="straightConnector1">
-            <a:avLst/>
-          </a:prstGeom>
-          <a:ln w="19050" cap="rnd">
-            <a:solidFill>
-              <a:schemeClr val="tx1"/>
-            </a:solidFill>
-            <a:tailEnd type="triangle"/>
-          </a:ln>
-        </p:spPr>
-        <p:style>
-          <a:lnRef idx="1">
-            <a:schemeClr val="accent1"/>
-          </a:lnRef>
-          <a:fillRef idx="0">
-            <a:schemeClr val="accent1"/>
-          </a:fillRef>
-          <a:effectRef idx="0">
-            <a:schemeClr val="accent1"/>
-          </a:effectRef>
-          <a:fontRef idx="minor">
-            <a:schemeClr val="tx1"/>
-          </a:fontRef>
-        </p:style>
-      </p:cxnSp>
-      <p:cxnSp>
-        <p:nvCxnSpPr>
-          <p:cNvPr id="13" name="直線矢印コネクタ 12">
-            <a:extLst>
-              <a:ext uri="{FF2B5EF4-FFF2-40B4-BE49-F238E27FC236}">
-                <a16:creationId xmlns:a16="http://schemas.microsoft.com/office/drawing/2014/main" id="{FB8AD1DC-A54B-34A6-AC9F-4B78F8090165}"/>
-              </a:ext>
-            </a:extLst>
-          </p:cNvPr>
-          <p:cNvCxnSpPr>
-            <a:cxnSpLocks/>
-            <a:stCxn id="6" idx="3"/>
-          </p:cNvCxnSpPr>
-          <p:nvPr/>
-        </p:nvCxnSpPr>
-        <p:spPr>
-          <a:xfrm flipV="1">
-            <a:off x="4778535" y="4315693"/>
-            <a:ext cx="293568" cy="5083"/>
-          </a:xfrm>
-          <a:prstGeom prst="straightConnector1">
-            <a:avLst/>
-          </a:prstGeom>
-          <a:ln w="19050" cap="rnd">
-            <a:solidFill>
-              <a:schemeClr val="tx1"/>
-            </a:solidFill>
-            <a:tailEnd type="triangle"/>
-          </a:ln>
-        </p:spPr>
-        <p:style>
-          <a:lnRef idx="1">
-            <a:schemeClr val="accent1"/>
-          </a:lnRef>
-          <a:fillRef idx="0">
-            <a:schemeClr val="accent1"/>
-          </a:fillRef>
-          <a:effectRef idx="0">
-            <a:schemeClr val="accent1"/>
-          </a:effectRef>
-          <a:fontRef idx="minor">
-            <a:schemeClr val="tx1"/>
-          </a:fontRef>
-        </p:style>
-      </p:cxnSp>
-      <p:sp>
-        <p:nvSpPr>
-          <p:cNvPr id="10" name="TextBox 21">
-            <a:extLst>
-              <a:ext uri="{FF2B5EF4-FFF2-40B4-BE49-F238E27FC236}">
-                <a16:creationId xmlns:a16="http://schemas.microsoft.com/office/drawing/2014/main" id="{EB29CED0-644D-ECAB-939A-97F5C02531F1}"/>
-              </a:ext>
-            </a:extLst>
-          </p:cNvPr>
-          <p:cNvSpPr txBox="1">
-            <a:spLocks noChangeArrowheads="1"/>
-          </p:cNvSpPr>
-          <p:nvPr/>
-        </p:nvSpPr>
-        <p:spPr bwMode="auto">
-          <a:xfrm>
-            <a:off x="8170399" y="3469663"/>
-            <a:ext cx="1081872" cy="261610"/>
-          </a:xfrm>
-          <a:prstGeom prst="rect">
-            <a:avLst/>
-          </a:prstGeom>
-          <a:noFill/>
-          <a:ln>
-            <a:noFill/>
-          </a:ln>
-          <a:extLst>
-            <a:ext uri="{909E8E84-426E-40DD-AFC4-6F175D3DCCD1}">
-              <a14:hiddenFill xmlns:a14="http://schemas.microsoft.com/office/drawing/2010/main">
-                <a:solidFill>
-                  <a:srgbClr val="FFFFFF"/>
-                </a:solidFill>
-              </a14:hiddenFill>
-            </a:ext>
-            <a:ext uri="{91240B29-F687-4F45-9708-019B960494DF}">
-              <a14:hiddenLine xmlns:a14="http://schemas.microsoft.com/office/drawing/2010/main" w="9525">
-                <a:solidFill>
-                  <a:srgbClr val="000000"/>
-                </a:solidFill>
-                <a:miter lim="800000"/>
-                <a:headEnd/>
-                <a:tailEnd/>
-              </a14:hiddenLine>
-            </a:ext>
-          </a:extLst>
-        </p:spPr>
-        <p:txBody>
-          <a:bodyPr wrap="square">
-            <a:spAutoFit/>
-          </a:bodyPr>
-          <a:lstStyle>
-            <a:lvl1pPr>
-              <a:defRPr>
-                <a:solidFill>
-                  <a:schemeClr val="tx1"/>
-                </a:solidFill>
-                <a:latin typeface="Calibri" panose="020F0502020204030204" pitchFamily="34" charset="0"/>
-              </a:defRPr>
-            </a:lvl1pPr>
-            <a:lvl2pPr marL="742950" indent="-285750">
-              <a:defRPr>
-                <a:solidFill>
-                  <a:schemeClr val="tx1"/>
-                </a:solidFill>
-                <a:latin typeface="Calibri" panose="020F0502020204030204" pitchFamily="34" charset="0"/>
-              </a:defRPr>
-            </a:lvl2pPr>
-            <a:lvl3pPr marL="1143000" indent="-228600">
-              <a:defRPr>
-                <a:solidFill>
-                  <a:schemeClr val="tx1"/>
-                </a:solidFill>
-                <a:latin typeface="Calibri" panose="020F0502020204030204" pitchFamily="34" charset="0"/>
-              </a:defRPr>
-            </a:lvl3pPr>
-            <a:lvl4pPr marL="1600200" indent="-228600">
-              <a:defRPr>
-                <a:solidFill>
-                  <a:schemeClr val="tx1"/>
-                </a:solidFill>
-                <a:latin typeface="Calibri" panose="020F0502020204030204" pitchFamily="34" charset="0"/>
-              </a:defRPr>
-            </a:lvl4pPr>
-            <a:lvl5pPr marL="2057400" indent="-228600">
-              <a:defRPr>
-                <a:solidFill>
-                  <a:schemeClr val="tx1"/>
-                </a:solidFill>
-                <a:latin typeface="Calibri" panose="020F0502020204030204" pitchFamily="34" charset="0"/>
-              </a:defRPr>
-            </a:lvl5pPr>
-            <a:lvl6pPr marL="2514600" indent="-228600" eaLnBrk="0" fontAlgn="base" hangingPunct="0">
-              <a:spcBef>
-                <a:spcPct val="0"/>
-              </a:spcBef>
-              <a:spcAft>
-                <a:spcPct val="0"/>
-              </a:spcAft>
-              <a:defRPr>
-                <a:solidFill>
-                  <a:schemeClr val="tx1"/>
-                </a:solidFill>
-                <a:latin typeface="Calibri" panose="020F0502020204030204" pitchFamily="34" charset="0"/>
-              </a:defRPr>
-            </a:lvl6pPr>
-            <a:lvl7pPr marL="2971800" indent="-228600" eaLnBrk="0" fontAlgn="base" hangingPunct="0">
-              <a:spcBef>
-                <a:spcPct val="0"/>
-              </a:spcBef>
-              <a:spcAft>
-                <a:spcPct val="0"/>
-              </a:spcAft>
-              <a:defRPr>
-                <a:solidFill>
-                  <a:schemeClr val="tx1"/>
-                </a:solidFill>
-                <a:latin typeface="Calibri" panose="020F0502020204030204" pitchFamily="34" charset="0"/>
-              </a:defRPr>
-            </a:lvl7pPr>
-            <a:lvl8pPr marL="3429000" indent="-228600" eaLnBrk="0" fontAlgn="base" hangingPunct="0">
-              <a:spcBef>
-                <a:spcPct val="0"/>
-              </a:spcBef>
-              <a:spcAft>
-                <a:spcPct val="0"/>
-              </a:spcAft>
-              <a:defRPr>
-                <a:solidFill>
-                  <a:schemeClr val="tx1"/>
-                </a:solidFill>
-                <a:latin typeface="Calibri" panose="020F0502020204030204" pitchFamily="34" charset="0"/>
-              </a:defRPr>
-            </a:lvl8pPr>
-            <a:lvl9pPr marL="3886200" indent="-228600" eaLnBrk="0" fontAlgn="base" hangingPunct="0">
-              <a:spcBef>
-                <a:spcPct val="0"/>
-              </a:spcBef>
-              <a:spcAft>
-                <a:spcPct val="0"/>
-              </a:spcAft>
-              <a:defRPr>
-                <a:solidFill>
-                  <a:schemeClr val="tx1"/>
-                </a:solidFill>
-                <a:latin typeface="Calibri" panose="020F0502020204030204" pitchFamily="34" charset="0"/>
-              </a:defRPr>
-            </a:lvl9pPr>
-          </a:lstStyle>
-          <a:p>
-            <a:pPr algn="ctr" eaLnBrk="1" hangingPunct="1">
-              <a:spcBef>
-                <a:spcPts val="600"/>
-              </a:spcBef>
-            </a:pPr>
-            <a:r>
-              <a:rPr lang="en-US" altLang="en-US" sz="1050" dirty="0">
-                <a:latin typeface="Meiryo" panose="020B0604030504040204" pitchFamily="34" charset="-128"/>
-                <a:ea typeface="Meiryo" panose="020B0604030504040204" pitchFamily="34" charset="-128"/>
-                <a:cs typeface="Arial" panose="020B0604020202020204" pitchFamily="34" charset="0"/>
-              </a:rPr>
-              <a:t>DMS SC</a:t>
-            </a:r>
-          </a:p>
-        </p:txBody>
-      </p:sp>
-      <p:pic>
-        <p:nvPicPr>
-          <p:cNvPr id="11" name="Graphic 18" descr="AWS Database Migration Service (AWS DMS) service icon.">
-            <a:extLst>
-              <a:ext uri="{FF2B5EF4-FFF2-40B4-BE49-F238E27FC236}">
-                <a16:creationId xmlns:a16="http://schemas.microsoft.com/office/drawing/2014/main" id="{69A71E23-4421-B1C7-A239-E56A87F5D53B}"/>
-              </a:ext>
-            </a:extLst>
-          </p:cNvPr>
-          <p:cNvPicPr>
-            <a:picLocks noChangeAspect="1" noChangeArrowheads="1"/>
-          </p:cNvPicPr>
-          <p:nvPr/>
-        </p:nvPicPr>
-        <p:blipFill>
-          <a:blip r:embed="rId21">
-            <a:extLst>
-              <a:ext uri="{96DAC541-7B7A-43D3-8B79-37D633B846F1}">
-                <asvg:svgBlip xmlns:asvg="http://schemas.microsoft.com/office/drawing/2016/SVG/main" r:embed="rId22"/>
-              </a:ext>
-            </a:extLst>
-          </a:blip>
-          <a:srcRect/>
-          <a:stretch/>
-        </p:blipFill>
-        <p:spPr bwMode="auto">
-          <a:xfrm>
-            <a:off x="8483039" y="2991670"/>
-            <a:ext cx="458713" cy="458713"/>
-          </a:xfrm>
-          <a:prstGeom prst="rect">
-            <a:avLst/>
-          </a:prstGeom>
-          <a:noFill/>
-          <a:ln>
-            <a:noFill/>
-          </a:ln>
-          <a:extLst>
-            <a:ext uri="{909E8E84-426E-40DD-AFC4-6F175D3DCCD1}">
-              <a14:hiddenFill xmlns:a14="http://schemas.microsoft.com/office/drawing/2010/main">
-                <a:solidFill>
-                  <a:srgbClr val="FFFFFF"/>
-                </a:solidFill>
-              </a14:hiddenFill>
-            </a:ext>
-            <a:ext uri="{91240B29-F687-4F45-9708-019B960494DF}">
-              <a14:hiddenLine xmlns:a14="http://schemas.microsoft.com/office/drawing/2010/main" w="9525">
-                <a:solidFill>
-                  <a:srgbClr val="000000"/>
-                </a:solidFill>
-                <a:miter lim="800000"/>
-                <a:headEnd/>
-                <a:tailEnd/>
-              </a14:hiddenLine>
-            </a:ext>
-          </a:extLst>
-        </p:spPr>
-      </p:pic>
+            </a:fontRef>
+          </p:style>
+        </p:cxnSp>
+      </p:grpSp>
     </p:spTree>
     <p:extLst>
       <p:ext uri="{BB962C8B-B14F-4D97-AF65-F5344CB8AC3E}">
@@ -4567,6 +4563,26 @@
 </file>
 
 <file path=customXml/item1.xml><?xml version="1.0" encoding="utf-8"?>
+<?mso-contentType ?>
+<FormTemplates xmlns="http://schemas.microsoft.com/sharepoint/v3/contenttype/forms">
+  <Display>DocumentLibraryForm</Display>
+  <Edit>DocumentLibraryForm</Edit>
+  <New>DocumentLibraryForm</New>
+</FormTemplates>
+</file>
+
+<file path=customXml/item2.xml><?xml version="1.0" encoding="utf-8"?>
+<p:properties xmlns:p="http://schemas.microsoft.com/office/2006/metadata/properties" xmlns:xsi="http://www.w3.org/2001/XMLSchema-instance" xmlns:pc="http://schemas.microsoft.com/office/infopath/2007/PartnerControls">
+  <documentManagement>
+    <lcf76f155ced4ddcb4097134ff3c332f xmlns="5858525f-8556-4a49-8c5b-46c9ac02e9a8">
+      <Terms xmlns="http://schemas.microsoft.com/office/infopath/2007/PartnerControls"/>
+    </lcf76f155ced4ddcb4097134ff3c332f>
+    <TaxCatchAll xmlns="c15da466-223d-4a9a-9a5d-eb2bee72a60a" xsi:nil="true"/>
+  </documentManagement>
+</p:properties>
+</file>
+
+<file path=customXml/item3.xml><?xml version="1.0" encoding="utf-8"?>
 <ct:contentTypeSchema xmlns:ct="http://schemas.microsoft.com/office/2006/metadata/contentType" xmlns:ma="http://schemas.microsoft.com/office/2006/metadata/properties/metaAttributes" ct:_="" ma:_="" ma:contentTypeName="Document" ma:contentTypeID="0x0101002892946DCD6EF84A8AD3B83D0B57F8EB" ma:contentTypeVersion="17" ma:contentTypeDescription="Create a new document." ma:contentTypeScope="" ma:versionID="b42be05bc74378c37795d3f925fb4a01">
   <xsd:schema xmlns:xsd="http://www.w3.org/2001/XMLSchema" xmlns:xs="http://www.w3.org/2001/XMLSchema" xmlns:p="http://schemas.microsoft.com/office/2006/metadata/properties" xmlns:ns2="5858525f-8556-4a49-8c5b-46c9ac02e9a8" xmlns:ns3="c15da466-223d-4a9a-9a5d-eb2bee72a60a" targetNamespace="http://schemas.microsoft.com/office/2006/metadata/properties" ma:root="true" ma:fieldsID="6370dd56b8fb32e5b01a7594ec1f1abe" ns2:_="" ns3:_="">
     <xsd:import namespace="5858525f-8556-4a49-8c5b-46c9ac02e9a8"/>
@@ -4815,41 +4831,10 @@
 </ct:contentTypeSchema>
 </file>
 
-<file path=customXml/item2.xml><?xml version="1.0" encoding="utf-8"?>
-<p:properties xmlns:p="http://schemas.microsoft.com/office/2006/metadata/properties" xmlns:xsi="http://www.w3.org/2001/XMLSchema-instance" xmlns:pc="http://schemas.microsoft.com/office/infopath/2007/PartnerControls">
-  <documentManagement>
-    <lcf76f155ced4ddcb4097134ff3c332f xmlns="5858525f-8556-4a49-8c5b-46c9ac02e9a8">
-      <Terms xmlns="http://schemas.microsoft.com/office/infopath/2007/PartnerControls"/>
-    </lcf76f155ced4ddcb4097134ff3c332f>
-    <TaxCatchAll xmlns="c15da466-223d-4a9a-9a5d-eb2bee72a60a" xsi:nil="true"/>
-  </documentManagement>
-</p:properties>
-</file>
-
-<file path=customXml/item3.xml><?xml version="1.0" encoding="utf-8"?>
-<?mso-contentType ?>
-<FormTemplates xmlns="http://schemas.microsoft.com/sharepoint/v3/contenttype/forms">
-  <Display>DocumentLibraryForm</Display>
-  <Edit>DocumentLibraryForm</Edit>
-  <New>DocumentLibraryForm</New>
-</FormTemplates>
-</file>
-
 <file path=customXml/itemProps1.xml><?xml version="1.0" encoding="utf-8"?>
-<ds:datastoreItem xmlns:ds="http://schemas.openxmlformats.org/officeDocument/2006/customXml" ds:itemID="{379A09CB-99D1-4CE1-93AE-964D83FB2A11}">
+<ds:datastoreItem xmlns:ds="http://schemas.openxmlformats.org/officeDocument/2006/customXml" ds:itemID="{3D7F2428-6C02-4D32-B14D-EBC3389A58AD}">
   <ds:schemaRefs>
-    <ds:schemaRef ds:uri="5858525f-8556-4a49-8c5b-46c9ac02e9a8"/>
-    <ds:schemaRef ds:uri="c15da466-223d-4a9a-9a5d-eb2bee72a60a"/>
-    <ds:schemaRef ds:uri="http://purl.org/dc/elements/1.1/"/>
-    <ds:schemaRef ds:uri="http://purl.org/dc/terms/"/>
-    <ds:schemaRef ds:uri="http://schemas.microsoft.com/internal/obd"/>
-    <ds:schemaRef ds:uri="http://schemas.microsoft.com/office/2006/documentManagement/types"/>
-    <ds:schemaRef ds:uri="http://schemas.microsoft.com/office/2006/metadata/contentType"/>
-    <ds:schemaRef ds:uri="http://schemas.microsoft.com/office/2006/metadata/properties"/>
-    <ds:schemaRef ds:uri="http://schemas.microsoft.com/office/2006/metadata/properties/metaAttributes"/>
-    <ds:schemaRef ds:uri="http://schemas.microsoft.com/office/infopath/2007/PartnerControls"/>
-    <ds:schemaRef ds:uri="http://schemas.openxmlformats.org/package/2006/metadata/core-properties"/>
-    <ds:schemaRef ds:uri="http://www.w3.org/2001/XMLSchema"/>
+    <ds:schemaRef ds:uri="http://schemas.microsoft.com/sharepoint/v3/contenttype/forms"/>
   </ds:schemaRefs>
 </ds:datastoreItem>
 </file>
@@ -4872,9 +4857,20 @@
 </file>
 
 <file path=customXml/itemProps3.xml><?xml version="1.0" encoding="utf-8"?>
-<ds:datastoreItem xmlns:ds="http://schemas.openxmlformats.org/officeDocument/2006/customXml" ds:itemID="{3D7F2428-6C02-4D32-B14D-EBC3389A58AD}">
+<ds:datastoreItem xmlns:ds="http://schemas.openxmlformats.org/officeDocument/2006/customXml" ds:itemID="{379A09CB-99D1-4CE1-93AE-964D83FB2A11}">
   <ds:schemaRefs>
-    <ds:schemaRef ds:uri="http://schemas.microsoft.com/sharepoint/v3/contenttype/forms"/>
+    <ds:schemaRef ds:uri="5858525f-8556-4a49-8c5b-46c9ac02e9a8"/>
+    <ds:schemaRef ds:uri="c15da466-223d-4a9a-9a5d-eb2bee72a60a"/>
+    <ds:schemaRef ds:uri="http://purl.org/dc/elements/1.1/"/>
+    <ds:schemaRef ds:uri="http://purl.org/dc/terms/"/>
+    <ds:schemaRef ds:uri="http://schemas.microsoft.com/internal/obd"/>
+    <ds:schemaRef ds:uri="http://schemas.microsoft.com/office/2006/documentManagement/types"/>
+    <ds:schemaRef ds:uri="http://schemas.microsoft.com/office/2006/metadata/contentType"/>
+    <ds:schemaRef ds:uri="http://schemas.microsoft.com/office/2006/metadata/properties"/>
+    <ds:schemaRef ds:uri="http://schemas.microsoft.com/office/2006/metadata/properties/metaAttributes"/>
+    <ds:schemaRef ds:uri="http://schemas.microsoft.com/office/infopath/2007/PartnerControls"/>
+    <ds:schemaRef ds:uri="http://schemas.openxmlformats.org/package/2006/metadata/core-properties"/>
+    <ds:schemaRef ds:uri="http://www.w3.org/2001/XMLSchema"/>
   </ds:schemaRefs>
 </ds:datastoreItem>
 </file>